--- a/assets/powerpoints/module-sante/B3-comprendre-la-posologie.pptx
+++ b/assets/powerpoints/module-sante/B3-comprendre-la-posologie.pptx
@@ -19,6 +19,7 @@
     <p:sldId id="267" r:id="rId19"/>
     <p:sldId id="268" r:id="rId20"/>
     <p:sldId id="269" r:id="rId21"/>
+    <p:sldId id="270" r:id="rId22"/>
   </p:sldIdLst>
   <p:sldSz cx="12191695" cy="6858000" type="screen4x3"/>
   <p:notesSz cx="6858000" cy="9144000"/>
@@ -585,7 +586,7 @@
           <a:lstStyle/>
           <a:p>
             <a:r>
-              <a:t>Chaque consigne est incomplète exprès. C'est l'exercice qui fait le plus travailler : il faut savoir ce qu'on ignore.</a:t>
+              <a:t>Corriger en groupe. Donner la bonne réponse, sans revenir sur qui s'est trompé.</a:t>
             </a:r>
           </a:p>
         </p:txBody>
@@ -655,7 +656,7 @@
           <a:lstStyle/>
           <a:p>
             <a:r>
-              <a:t>Corriger en groupe. Donner la bonne réponse, sans revenir sur qui s'est trompé.</a:t>
+              <a:t>Chaque consigne est incomplète exprès. C'est l'exercice qui fait le plus travailler : il faut savoir ce qu'on ignore.</a:t>
             </a:r>
           </a:p>
         </p:txBody>
@@ -725,7 +726,7 @@
           <a:lstStyle/>
           <a:p>
             <a:r>
-              <a:t>Erreur très répandue, dans toutes les langues. La nommer sans moraliser : l'important est la phrase à retenir.</a:t>
+              <a:t>Corriger en groupe. Donner la bonne réponse, sans revenir sur qui s'est trompé.</a:t>
             </a:r>
           </a:p>
         </p:txBody>
@@ -795,7 +796,7 @@
           <a:lstStyle/>
           <a:p>
             <a:r>
-              <a:t>Quinze minutes. Ceux qui n'ont rien apporté travaillent sur les étiquettes du groupe. Ne jamais commenter le médicament de quelqu'un devant la classe.</a:t>
+              <a:t>Erreur très répandue, dans toutes les langues. La nommer sans moraliser : l'important est la phrase à retenir.</a:t>
             </a:r>
           </a:p>
         </p:txBody>
@@ -865,6 +866,76 @@
           <a:lstStyle/>
           <a:p>
             <a:r>
+              <a:t>Quinze minutes. Ceux qui n'ont rien apporté travaillent sur les étiquettes du groupe. Ne jamais commenter le médicament de quelqu'un devant la classe.</a:t>
+            </a:r>
+          </a:p>
+        </p:txBody>
+      </p:sp>
+      <p:sp>
+        <p:nvSpPr>
+          <p:cNvPr id="4" name="Slide Number Placeholder 3"/>
+          <p:cNvSpPr>
+            <a:spLocks noGrp="1"/>
+          </p:cNvSpPr>
+          <p:nvPr>
+            <p:ph type="sldNum" idx="5" sz="quarter"/>
+          </p:nvPr>
+        </p:nvSpPr>
+        <p:spPr/>
+      </p:sp>
+    </p:spTree>
+  </p:cSld>
+  <p:clrMapOvr>
+    <a:masterClrMapping/>
+  </p:clrMapOvr>
+</p:notes>
+</file>
+
+<file path=ppt/notesSlides/notesSlide15.xml><?xml version="1.0" encoding="utf-8"?>
+<p:notes xmlns:a="http://schemas.openxmlformats.org/drawingml/2006/main" xmlns:p="http://schemas.openxmlformats.org/presentationml/2006/main" xmlns:r="http://schemas.openxmlformats.org/officeDocument/2006/relationships">
+  <p:cSld>
+    <p:spTree>
+      <p:nvGrpSpPr>
+        <p:cNvPr id="1" name=""/>
+        <p:cNvGrpSpPr/>
+        <p:nvPr/>
+      </p:nvGrpSpPr>
+      <p:grpSpPr>
+        <a:xfrm>
+          <a:off x="0" y="0"/>
+          <a:ext cx="0" cy="0"/>
+          <a:chOff x="0" y="0"/>
+          <a:chExt cx="0" cy="0"/>
+        </a:xfrm>
+      </p:grpSpPr>
+      <p:sp>
+        <p:nvSpPr>
+          <p:cNvPr id="2" name="Slide Image Placeholder 1"/>
+          <p:cNvSpPr>
+            <a:spLocks noGrp="1"/>
+          </p:cNvSpPr>
+          <p:nvPr>
+            <p:ph type="sldImg" idx="2"/>
+          </p:nvPr>
+        </p:nvSpPr>
+        <p:spPr/>
+      </p:sp>
+      <p:sp>
+        <p:nvSpPr>
+          <p:cNvPr id="3" name="Notes Placeholder 2"/>
+          <p:cNvSpPr>
+            <a:spLocks noGrp="1"/>
+          </p:cNvSpPr>
+          <p:nvPr>
+            <p:ph type="body" idx="3" sz="quarter"/>
+          </p:nvPr>
+        </p:nvSpPr>
+        <p:spPr/>
+        <p:txBody>
+          <a:bodyPr/>
+          <a:lstStyle/>
+          <a:p>
+            <a:r>
               <a:t>Ramasser. Vérifier surtout la quatrième ligne : c'est celle qu'on oublie de lire sur les vraies boîtes.</a:t>
             </a:r>
           </a:p>
@@ -1145,7 +1216,7 @@
           <a:lstStyle/>
           <a:p>
             <a:r>
-              <a:t>Faire chercher ces quatre réponses sur les vraies étiquettes apportées. Dix minutes, à deux.</a:t>
+              <a:t>Projeter avant d'ouvrir l'activité. Faire dire à deux ou trois élèves où irait la première réponse, sans y toucher : on vérifie qu'ils ont compris la consigne, pas le contenu. Ouvrir ensuite le module sur les postes.</a:t>
             </a:r>
           </a:p>
         </p:txBody>
@@ -1215,7 +1286,7 @@
           <a:lstStyle/>
           <a:p>
             <a:r>
-              <a:t>Point de santé publique, pas seulement de langue. Le dire simplement et le laisser à l'écran une minute entière.</a:t>
+              <a:t>Faire chercher ces quatre réponses sur les vraies étiquettes apportées. Dix minutes, à deux.</a:t>
             </a:r>
           </a:p>
         </p:txBody>
@@ -1285,7 +1356,7 @@
           <a:lstStyle/>
           <a:p>
             <a:r>
-              <a:t>Ces quatre expressions sont sur les étiquettes mais absentes des dialogues du module : ce sont elles qui bloquent en pharmacie.</a:t>
+              <a:t>Point de santé publique, pas seulement de langue. Le dire simplement et le laisser à l'écran une minute entière.</a:t>
             </a:r>
           </a:p>
         </p:txBody>
@@ -1355,7 +1426,7 @@
           <a:lstStyle/>
           <a:p>
             <a:r>
-              <a:t>Refuser la traduction mot à mot : on veut le geste, pas le synonyme.</a:t>
+              <a:t>Ces quatre expressions sont sur les étiquettes mais absentes des dialogues du module : ce sont elles qui bloquent en pharmacie.</a:t>
             </a:r>
           </a:p>
         </p:txBody>
@@ -1425,7 +1496,7 @@
           <a:lstStyle/>
           <a:p>
             <a:r>
-              <a:t>Corriger en groupe. Donner la bonne réponse, sans revenir sur qui s'est trompé.</a:t>
+              <a:t>Refuser la traduction mot à mot : on veut le geste, pas le synonyme.</a:t>
             </a:r>
           </a:p>
         </p:txBody>
@@ -4847,7 +4918,7 @@
                 </a:solidFill>
                 <a:latin typeface="Verdana"/>
               </a:rPr>
-              <a:t>PRATIQUE · 3 DE 4</a:t>
+              <a:t>CORRECTION</a:t>
             </a:r>
           </a:p>
         </p:txBody>
@@ -4886,7 +4957,7 @@
                 </a:solidFill>
                 <a:latin typeface="Verdana"/>
               </a:rPr>
-              <a:t>Il manque une information</a:t>
+              <a:t>Qu'est-ce que ça veut dire ?</a:t>
             </a:r>
           </a:p>
         </p:txBody>
@@ -4925,7 +4996,7 @@
                 </a:solidFill>
                 <a:latin typeface="Verdana"/>
               </a:rPr>
-              <a:t>Quelle question posez-vous au pharmacien ?</a:t>
+              <a:t>Correction — on lit la réponse, on ne commente pas l'erreur.</a:t>
             </a:r>
           </a:p>
         </p:txBody>
@@ -4939,15 +5010,15 @@
         <p:spPr>
           <a:xfrm>
             <a:off x="566928" y="2139696"/>
-            <a:ext cx="11057839" cy="986535"/>
+            <a:ext cx="11057839" cy="648716"/>
           </a:xfrm>
           <a:prstGeom prst="roundRect">
             <a:avLst>
-              <a:gd name="adj" fmla="val 14830"/>
+              <a:gd name="adj" fmla="val 22552"/>
             </a:avLst>
           </a:prstGeom>
           <a:solidFill>
-            <a:srgbClr val="FFFFFF"/>
+            <a:srgbClr val="E6F5EE"/>
           </a:solidFill>
           <a:ln w="12700">
             <a:solidFill>
@@ -4984,7 +5055,7 @@
         </p:nvSpPr>
         <p:spPr>
           <a:xfrm>
-            <a:off x="841247" y="2450083"/>
+            <a:off x="841247" y="2281174"/>
             <a:ext cx="365760" cy="365760"/>
           </a:xfrm>
           <a:prstGeom prst="roundRect">
@@ -5028,7 +5099,7 @@
         </p:nvSpPr>
         <p:spPr>
           <a:xfrm>
-            <a:off x="841247" y="2514091"/>
+            <a:off x="841247" y="2345182"/>
             <a:ext cx="365760" cy="256032"/>
           </a:xfrm>
           <a:prstGeom prst="rect">
@@ -5068,7 +5139,7 @@
         <p:spPr>
           <a:xfrm>
             <a:off x="1344168" y="2295144"/>
-            <a:ext cx="10097719" cy="712215"/>
+            <a:ext cx="10097719" cy="374396"/>
           </a:xfrm>
           <a:prstGeom prst="rect">
             <a:avLst/>
@@ -5093,7 +5164,16 @@
                 </a:solidFill>
                 <a:latin typeface="Verdana"/>
               </a:rPr>
-              <a:t>« Prenez un comprimé par jour. »</a:t>
+              <a:t>« Un comprimé aux douze heures. »   </a:t>
+            </a:r>
+            <a:r>
+              <a:rPr sz="1900" b="1" i="0">
+                <a:solidFill>
+                  <a:srgbClr val="07734A"/>
+                </a:solidFill>
+                <a:latin typeface="Verdana"/>
+              </a:rPr>
+              <a:t>» un le matin, un le soir</a:t>
             </a:r>
           </a:p>
         </p:txBody>
@@ -5106,7 +5186,7 @@
         </p:nvSpPr>
         <p:spPr>
           <a:xfrm>
-            <a:off x="566928" y="3254248"/>
+            <a:off x="566928" y="2916428"/>
             <a:ext cx="11057839" cy="986535"/>
           </a:xfrm>
           <a:prstGeom prst="roundRect">
@@ -5115,7 +5195,7 @@
             </a:avLst>
           </a:prstGeom>
           <a:solidFill>
-            <a:srgbClr val="FFFFFF"/>
+            <a:srgbClr val="E6F5EE"/>
           </a:solidFill>
           <a:ln w="12700">
             <a:solidFill>
@@ -5152,7 +5232,7 @@
         </p:nvSpPr>
         <p:spPr>
           <a:xfrm>
-            <a:off x="841247" y="3564635"/>
+            <a:off x="841247" y="3226815"/>
             <a:ext cx="365760" cy="365760"/>
           </a:xfrm>
           <a:prstGeom prst="roundRect">
@@ -5196,7 +5276,7 @@
         </p:nvSpPr>
         <p:spPr>
           <a:xfrm>
-            <a:off x="841247" y="3628643"/>
+            <a:off x="841247" y="3290823"/>
             <a:ext cx="365760" cy="256032"/>
           </a:xfrm>
           <a:prstGeom prst="rect">
@@ -5235,7 +5315,7 @@
         </p:nvSpPr>
         <p:spPr>
           <a:xfrm>
-            <a:off x="1344168" y="3409696"/>
+            <a:off x="1344168" y="3071876"/>
             <a:ext cx="10097719" cy="712215"/>
           </a:xfrm>
           <a:prstGeom prst="rect">
@@ -5261,7 +5341,16 @@
                 </a:solidFill>
                 <a:latin typeface="Verdana"/>
               </a:rPr>
-              <a:t>« Deux fois par jour, pendant dix jours. »</a:t>
+              <a:t>« Deux comprimés au besoin, maximum six par jour. »   </a:t>
+            </a:r>
+            <a:r>
+              <a:rPr sz="1900" b="1" i="0">
+                <a:solidFill>
+                  <a:srgbClr val="07734A"/>
+                </a:solidFill>
+                <a:latin typeface="Verdana"/>
+              </a:rPr>
+              <a:t>» seulement si j'ai mal, et jamais plus de six</a:t>
             </a:r>
           </a:p>
         </p:txBody>
@@ -5274,16 +5363,16 @@
         </p:nvSpPr>
         <p:spPr>
           <a:xfrm>
-            <a:off x="566928" y="4368800"/>
-            <a:ext cx="11057839" cy="986535"/>
+            <a:off x="566928" y="4030980"/>
+            <a:ext cx="11057839" cy="648716"/>
           </a:xfrm>
           <a:prstGeom prst="roundRect">
             <a:avLst>
-              <a:gd name="adj" fmla="val 14830"/>
+              <a:gd name="adj" fmla="val 22552"/>
             </a:avLst>
           </a:prstGeom>
           <a:solidFill>
-            <a:srgbClr val="FFFFFF"/>
+            <a:srgbClr val="E6F5EE"/>
           </a:solidFill>
           <a:ln w="12700">
             <a:solidFill>
@@ -5320,7 +5409,7 @@
         </p:nvSpPr>
         <p:spPr>
           <a:xfrm>
-            <a:off x="841247" y="4679188"/>
+            <a:off x="841247" y="4172458"/>
             <a:ext cx="365760" cy="365760"/>
           </a:xfrm>
           <a:prstGeom prst="roundRect">
@@ -5364,7 +5453,7 @@
         </p:nvSpPr>
         <p:spPr>
           <a:xfrm>
-            <a:off x="841247" y="4743196"/>
+            <a:off x="841247" y="4236466"/>
             <a:ext cx="365760" cy="256032"/>
           </a:xfrm>
           <a:prstGeom prst="rect">
@@ -5403,8 +5492,8 @@
         </p:nvSpPr>
         <p:spPr>
           <a:xfrm>
-            <a:off x="1344168" y="4524248"/>
-            <a:ext cx="10097719" cy="712215"/>
+            <a:off x="1344168" y="4186428"/>
+            <a:ext cx="10097719" cy="374396"/>
           </a:xfrm>
           <a:prstGeom prst="rect">
             <a:avLst/>
@@ -5429,7 +5518,193 @@
                 </a:solidFill>
                 <a:latin typeface="Verdana"/>
               </a:rPr>
-              <a:t>« Un comprimé le matin, pendant une semaine. »</a:t>
+              <a:t>« À prendre à jeun. »   </a:t>
+            </a:r>
+            <a:r>
+              <a:rPr sz="1900" b="1" i="0">
+                <a:solidFill>
+                  <a:srgbClr val="07734A"/>
+                </a:solidFill>
+                <a:latin typeface="Verdana"/>
+              </a:rPr>
+              <a:t>» l'estomac vide, avant de manger</a:t>
+            </a:r>
+          </a:p>
+        </p:txBody>
+      </p:sp>
+      <p:sp>
+        <p:nvSpPr>
+          <p:cNvPr id="20" name="Rounded Rectangle 19"/>
+          <p:cNvSpPr/>
+          <p:nvPr/>
+        </p:nvSpPr>
+        <p:spPr>
+          <a:xfrm>
+            <a:off x="566928" y="4807711"/>
+            <a:ext cx="11057839" cy="648716"/>
+          </a:xfrm>
+          <a:prstGeom prst="roundRect">
+            <a:avLst>
+              <a:gd name="adj" fmla="val 22552"/>
+            </a:avLst>
+          </a:prstGeom>
+          <a:solidFill>
+            <a:srgbClr val="E6F5EE"/>
+          </a:solidFill>
+          <a:ln w="12700">
+            <a:solidFill>
+              <a:srgbClr val="EAEAE8"/>
+            </a:solidFill>
+          </a:ln>
+          <a:effectLst/>
+        </p:spPr>
+        <p:style>
+          <a:lnRef idx="1">
+            <a:schemeClr val="accent1"/>
+          </a:lnRef>
+          <a:fillRef idx="3">
+            <a:schemeClr val="accent1"/>
+          </a:fillRef>
+          <a:effectRef idx="2">
+            <a:schemeClr val="accent1"/>
+          </a:effectRef>
+          <a:fontRef idx="minor">
+            <a:schemeClr val="lt1"/>
+          </a:fontRef>
+        </p:style>
+        <p:txBody>
+          <a:bodyPr rtlCol="0" anchor="ctr"/>
+          <a:lstStyle/>
+          <a:p/>
+        </p:txBody>
+      </p:sp>
+      <p:sp>
+        <p:nvSpPr>
+          <p:cNvPr id="21" name="Rounded Rectangle 20"/>
+          <p:cNvSpPr/>
+          <p:nvPr/>
+        </p:nvSpPr>
+        <p:spPr>
+          <a:xfrm>
+            <a:off x="841247" y="4949190"/>
+            <a:ext cx="365760" cy="365760"/>
+          </a:xfrm>
+          <a:prstGeom prst="roundRect">
+            <a:avLst>
+              <a:gd name="adj" fmla="val 32500"/>
+            </a:avLst>
+          </a:prstGeom>
+          <a:solidFill>
+            <a:srgbClr val="E7F0F6"/>
+          </a:solidFill>
+          <a:ln>
+            <a:noFill/>
+          </a:ln>
+          <a:effectLst/>
+        </p:spPr>
+        <p:style>
+          <a:lnRef idx="1">
+            <a:schemeClr val="accent1"/>
+          </a:lnRef>
+          <a:fillRef idx="3">
+            <a:schemeClr val="accent1"/>
+          </a:fillRef>
+          <a:effectRef idx="2">
+            <a:schemeClr val="accent1"/>
+          </a:effectRef>
+          <a:fontRef idx="minor">
+            <a:schemeClr val="lt1"/>
+          </a:fontRef>
+        </p:style>
+        <p:txBody>
+          <a:bodyPr rtlCol="0" anchor="ctr"/>
+          <a:lstStyle/>
+          <a:p/>
+        </p:txBody>
+      </p:sp>
+      <p:sp>
+        <p:nvSpPr>
+          <p:cNvPr id="22" name="TextBox 21"/>
+          <p:cNvSpPr txBox="1"/>
+          <p:nvPr/>
+        </p:nvSpPr>
+        <p:spPr>
+          <a:xfrm>
+            <a:off x="841247" y="5013198"/>
+            <a:ext cx="365760" cy="256032"/>
+          </a:xfrm>
+          <a:prstGeom prst="rect">
+            <a:avLst/>
+          </a:prstGeom>
+          <a:noFill/>
+        </p:spPr>
+        <p:txBody>
+          <a:bodyPr wrap="square" lIns="0" rIns="0" tIns="0" bIns="0" anchor="t">
+            <a:spAutoFit/>
+          </a:bodyPr>
+          <a:lstStyle/>
+          <a:p>
+            <a:pPr algn="ctr">
+              <a:lnSpc>
+                <a:spcPct val="135000"/>
+              </a:lnSpc>
+            </a:pPr>
+            <a:r>
+              <a:rPr sz="1500" b="1" i="0">
+                <a:solidFill>
+                  <a:srgbClr val="1D6B8F"/>
+                </a:solidFill>
+                <a:latin typeface="Verdana"/>
+              </a:rPr>
+              <a:t>4</a:t>
+            </a:r>
+          </a:p>
+        </p:txBody>
+      </p:sp>
+      <p:sp>
+        <p:nvSpPr>
+          <p:cNvPr id="23" name="TextBox 22"/>
+          <p:cNvSpPr txBox="1"/>
+          <p:nvPr/>
+        </p:nvSpPr>
+        <p:spPr>
+          <a:xfrm>
+            <a:off x="1344168" y="4963159"/>
+            <a:ext cx="10097719" cy="374396"/>
+          </a:xfrm>
+          <a:prstGeom prst="rect">
+            <a:avLst/>
+          </a:prstGeom>
+          <a:noFill/>
+        </p:spPr>
+        <p:txBody>
+          <a:bodyPr wrap="square" lIns="0" rIns="0" tIns="0" bIns="0" anchor="t">
+            <a:spAutoFit/>
+          </a:bodyPr>
+          <a:lstStyle/>
+          <a:p>
+            <a:pPr algn="l">
+              <a:lnSpc>
+                <a:spcPct val="140000"/>
+              </a:lnSpc>
+            </a:pPr>
+            <a:r>
+              <a:rPr sz="1900" b="0" i="0">
+                <a:solidFill>
+                  <a:srgbClr val="3A3D40"/>
+                </a:solidFill>
+                <a:latin typeface="Verdana"/>
+              </a:rPr>
+              <a:t>« Jusqu'à la fin du traitement. »   </a:t>
+            </a:r>
+            <a:r>
+              <a:rPr sz="1900" b="1" i="0">
+                <a:solidFill>
+                  <a:srgbClr val="07734A"/>
+                </a:solidFill>
+                <a:latin typeface="Verdana"/>
+              </a:rPr>
+              <a:t>» toute la boîte, même si je vais mieux</a:t>
             </a:r>
           </a:p>
         </p:txBody>
@@ -5606,7 +5881,7 @@
                 </a:solidFill>
                 <a:latin typeface="Verdana"/>
               </a:rPr>
-              <a:t>CORRECTION</a:t>
+              <a:t>PRATIQUE · 3 DE 4</a:t>
             </a:r>
           </a:p>
         </p:txBody>
@@ -5684,7 +5959,7 @@
                 </a:solidFill>
                 <a:latin typeface="Verdana"/>
               </a:rPr>
-              <a:t>Correction — on lit la réponse, on ne commente pas l'erreur.</a:t>
+              <a:t>Quelle question posez-vous au pharmacien ?</a:t>
             </a:r>
           </a:p>
         </p:txBody>
@@ -5706,7 +5981,7 @@
             </a:avLst>
           </a:prstGeom>
           <a:solidFill>
-            <a:srgbClr val="E6F5EE"/>
+            <a:srgbClr val="FFFFFF"/>
           </a:solidFill>
           <a:ln w="12700">
             <a:solidFill>
@@ -5852,16 +6127,7 @@
                 </a:solidFill>
                 <a:latin typeface="Verdana"/>
               </a:rPr>
-              <a:t>« Prenez un comprimé par jour. »   </a:t>
-            </a:r>
-            <a:r>
-              <a:rPr sz="1900" b="1" i="0">
-                <a:solidFill>
-                  <a:srgbClr val="07734A"/>
-                </a:solidFill>
-                <a:latin typeface="Verdana"/>
-              </a:rPr>
-              <a:t>» Pendant combien de temps ? / À quel moment de la journée ?</a:t>
+              <a:t>« Prenez un comprimé par jour. »</a:t>
             </a:r>
           </a:p>
         </p:txBody>
@@ -5883,7 +6149,7 @@
             </a:avLst>
           </a:prstGeom>
           <a:solidFill>
-            <a:srgbClr val="E6F5EE"/>
+            <a:srgbClr val="FFFFFF"/>
           </a:solidFill>
           <a:ln w="12700">
             <a:solidFill>
@@ -6029,16 +6295,7 @@
                 </a:solidFill>
                 <a:latin typeface="Verdana"/>
               </a:rPr>
-              <a:t>« Deux fois par jour, pendant dix jours. »   </a:t>
-            </a:r>
-            <a:r>
-              <a:rPr sz="1900" b="1" i="0">
-                <a:solidFill>
-                  <a:srgbClr val="07734A"/>
-                </a:solidFill>
-                <a:latin typeface="Verdana"/>
-              </a:rPr>
-              <a:t>» Combien de comprimés à la fois ? / Avec ou sans nourriture ?</a:t>
+              <a:t>« Deux fois par jour, pendant dix jours. »</a:t>
             </a:r>
           </a:p>
         </p:txBody>
@@ -6060,7 +6317,7 @@
             </a:avLst>
           </a:prstGeom>
           <a:solidFill>
-            <a:srgbClr val="E6F5EE"/>
+            <a:srgbClr val="FFFFFF"/>
           </a:solidFill>
           <a:ln w="12700">
             <a:solidFill>
@@ -6206,16 +6463,7 @@
                 </a:solidFill>
                 <a:latin typeface="Verdana"/>
               </a:rPr>
-              <a:t>« Un comprimé le matin, pendant une semaine. »   </a:t>
-            </a:r>
-            <a:r>
-              <a:rPr sz="1900" b="1" i="0">
-                <a:solidFill>
-                  <a:srgbClr val="07734A"/>
-                </a:solidFill>
-                <a:latin typeface="Verdana"/>
-              </a:rPr>
-              <a:t>» Est-ce que je peux boire de l'alcool ? / Le prendre en mangeant ?</a:t>
+              <a:t>« Un comprimé le matin, pendant une semaine. »</a:t>
             </a:r>
           </a:p>
         </p:txBody>
@@ -6392,7 +6640,7 @@
                 </a:solidFill>
                 <a:latin typeface="Verdana"/>
               </a:rPr>
-              <a:t>LE PIÈGE DU « JE VAIS MIEUX »</a:t>
+              <a:t>CORRECTION</a:t>
             </a:r>
           </a:p>
         </p:txBody>
@@ -6431,67 +6679,21 @@
                 </a:solidFill>
                 <a:latin typeface="Verdana"/>
               </a:rPr>
-              <a:t>Le piège le plus fréquent</a:t>
-            </a:r>
-          </a:p>
-        </p:txBody>
-      </p:sp>
-      <p:sp>
-        <p:nvSpPr>
-          <p:cNvPr id="7" name="Rounded Rectangle 6"/>
-          <p:cNvSpPr/>
-          <p:nvPr/>
-        </p:nvSpPr>
-        <p:spPr>
-          <a:xfrm>
-            <a:off x="566928" y="1856232"/>
-            <a:ext cx="5428335" cy="2331720"/>
-          </a:xfrm>
-          <a:prstGeom prst="roundRect">
-            <a:avLst>
-              <a:gd name="adj" fmla="val 6274"/>
-            </a:avLst>
-          </a:prstGeom>
-          <a:solidFill>
-            <a:srgbClr val="FFF6F5"/>
-          </a:solidFill>
-          <a:ln w="12700">
-            <a:solidFill>
-              <a:srgbClr val="DC2626"/>
-            </a:solidFill>
-          </a:ln>
-          <a:effectLst/>
-        </p:spPr>
-        <p:style>
-          <a:lnRef idx="1">
-            <a:schemeClr val="accent1"/>
-          </a:lnRef>
-          <a:fillRef idx="3">
-            <a:schemeClr val="accent1"/>
-          </a:fillRef>
-          <a:effectRef idx="2">
-            <a:schemeClr val="accent1"/>
-          </a:effectRef>
-          <a:fontRef idx="minor">
-            <a:schemeClr val="lt1"/>
-          </a:fontRef>
-        </p:style>
-        <p:txBody>
-          <a:bodyPr rtlCol="0" anchor="ctr"/>
-          <a:lstStyle/>
-          <a:p/>
-        </p:txBody>
-      </p:sp>
-      <p:sp>
-        <p:nvSpPr>
-          <p:cNvPr id="8" name="TextBox 7"/>
+              <a:t>Il manque une information</a:t>
+            </a:r>
+          </a:p>
+        </p:txBody>
+      </p:sp>
+      <p:sp>
+        <p:nvSpPr>
+          <p:cNvPr id="7" name="TextBox 6"/>
           <p:cNvSpPr txBox="1"/>
           <p:nvPr/>
         </p:nvSpPr>
         <p:spPr>
           <a:xfrm>
-            <a:off x="932688" y="2130552"/>
-            <a:ext cx="4696815" cy="274320"/>
+            <a:off x="566928" y="1645920"/>
+            <a:ext cx="11057839" cy="329184"/>
           </a:xfrm>
           <a:prstGeom prst="rect">
             <a:avLst/>
@@ -6510,198 +6712,35 @@
               </a:lnSpc>
             </a:pPr>
             <a:r>
-              <a:rPr sz="1300" b="1" i="0" spc="156">
-                <a:solidFill>
-                  <a:srgbClr val="B91C1C"/>
-                </a:solidFill>
-                <a:latin typeface="Verdana"/>
-              </a:rPr>
-              <a:t>ON ENTEND SOUVENT</a:t>
-            </a:r>
-          </a:p>
-        </p:txBody>
-      </p:sp>
-      <p:sp>
-        <p:nvSpPr>
-          <p:cNvPr id="9" name="TextBox 8"/>
-          <p:cNvSpPr txBox="1"/>
-          <p:nvPr/>
-        </p:nvSpPr>
-        <p:spPr>
-          <a:xfrm>
-            <a:off x="932688" y="2569464"/>
-            <a:ext cx="4696815" cy="1417320"/>
-          </a:xfrm>
-          <a:prstGeom prst="rect">
-            <a:avLst/>
-          </a:prstGeom>
-          <a:noFill/>
-        </p:spPr>
-        <p:txBody>
-          <a:bodyPr wrap="square" lIns="0" rIns="0" tIns="0" bIns="0" anchor="t">
-            <a:spAutoFit/>
-          </a:bodyPr>
-          <a:lstStyle/>
-          <a:p>
-            <a:pPr algn="l">
-              <a:lnSpc>
-                <a:spcPct val="130000"/>
-              </a:lnSpc>
-            </a:pPr>
-            <a:r>
-              <a:rPr sz="2500" b="1" i="0">
-                <a:solidFill>
-                  <a:srgbClr val="17181A"/>
-                </a:solidFill>
-                <a:latin typeface="Verdana"/>
-              </a:rPr>
-              <a:t>Je me sens mieux, j'arrête les antibiotiques.</a:t>
-            </a:r>
-          </a:p>
-        </p:txBody>
-      </p:sp>
-      <p:sp>
-        <p:nvSpPr>
-          <p:cNvPr id="10" name="Rounded Rectangle 9"/>
+              <a:rPr sz="1800" b="0" i="0">
+                <a:solidFill>
+                  <a:srgbClr val="6E7175"/>
+                </a:solidFill>
+                <a:latin typeface="Verdana"/>
+              </a:rPr>
+              <a:t>Correction — on lit la réponse, on ne commente pas l'erreur.</a:t>
+            </a:r>
+          </a:p>
+        </p:txBody>
+      </p:sp>
+      <p:sp>
+        <p:nvSpPr>
+          <p:cNvPr id="8" name="Rounded Rectangle 7"/>
           <p:cNvSpPr/>
           <p:nvPr/>
         </p:nvSpPr>
         <p:spPr>
           <a:xfrm>
-            <a:off x="6196431" y="1856232"/>
-            <a:ext cx="5428335" cy="2331720"/>
+            <a:off x="566928" y="2139696"/>
+            <a:ext cx="11057839" cy="986535"/>
           </a:xfrm>
           <a:prstGeom prst="roundRect">
             <a:avLst>
-              <a:gd name="adj" fmla="val 6274"/>
+              <a:gd name="adj" fmla="val 14830"/>
             </a:avLst>
           </a:prstGeom>
           <a:solidFill>
             <a:srgbClr val="E6F5EE"/>
-          </a:solidFill>
-          <a:ln w="12700">
-            <a:solidFill>
-              <a:srgbClr val="0A8F5B"/>
-            </a:solidFill>
-          </a:ln>
-          <a:effectLst/>
-        </p:spPr>
-        <p:style>
-          <a:lnRef idx="1">
-            <a:schemeClr val="accent1"/>
-          </a:lnRef>
-          <a:fillRef idx="3">
-            <a:schemeClr val="accent1"/>
-          </a:fillRef>
-          <a:effectRef idx="2">
-            <a:schemeClr val="accent1"/>
-          </a:effectRef>
-          <a:fontRef idx="minor">
-            <a:schemeClr val="lt1"/>
-          </a:fontRef>
-        </p:style>
-        <p:txBody>
-          <a:bodyPr rtlCol="0" anchor="ctr"/>
-          <a:lstStyle/>
-          <a:p/>
-        </p:txBody>
-      </p:sp>
-      <p:sp>
-        <p:nvSpPr>
-          <p:cNvPr id="11" name="TextBox 10"/>
-          <p:cNvSpPr txBox="1"/>
-          <p:nvPr/>
-        </p:nvSpPr>
-        <p:spPr>
-          <a:xfrm>
-            <a:off x="6562191" y="2130552"/>
-            <a:ext cx="4696815" cy="274320"/>
-          </a:xfrm>
-          <a:prstGeom prst="rect">
-            <a:avLst/>
-          </a:prstGeom>
-          <a:noFill/>
-        </p:spPr>
-        <p:txBody>
-          <a:bodyPr wrap="square" lIns="0" rIns="0" tIns="0" bIns="0" anchor="t">
-            <a:spAutoFit/>
-          </a:bodyPr>
-          <a:lstStyle/>
-          <a:p>
-            <a:pPr algn="l">
-              <a:lnSpc>
-                <a:spcPct val="135000"/>
-              </a:lnSpc>
-            </a:pPr>
-            <a:r>
-              <a:rPr sz="1300" b="1" i="0" spc="156">
-                <a:solidFill>
-                  <a:srgbClr val="07734A"/>
-                </a:solidFill>
-                <a:latin typeface="Verdana"/>
-              </a:rPr>
-              <a:t>IL FAUT DIRE PLUTÔT</a:t>
-            </a:r>
-          </a:p>
-        </p:txBody>
-      </p:sp>
-      <p:sp>
-        <p:nvSpPr>
-          <p:cNvPr id="12" name="TextBox 11"/>
-          <p:cNvSpPr txBox="1"/>
-          <p:nvPr/>
-        </p:nvSpPr>
-        <p:spPr>
-          <a:xfrm>
-            <a:off x="6562191" y="2569464"/>
-            <a:ext cx="4696815" cy="1417320"/>
-          </a:xfrm>
-          <a:prstGeom prst="rect">
-            <a:avLst/>
-          </a:prstGeom>
-          <a:noFill/>
-        </p:spPr>
-        <p:txBody>
-          <a:bodyPr wrap="square" lIns="0" rIns="0" tIns="0" bIns="0" anchor="t">
-            <a:spAutoFit/>
-          </a:bodyPr>
-          <a:lstStyle/>
-          <a:p>
-            <a:pPr algn="l">
-              <a:lnSpc>
-                <a:spcPct val="130000"/>
-              </a:lnSpc>
-            </a:pPr>
-            <a:r>
-              <a:rPr sz="2500" b="1" i="0">
-                <a:solidFill>
-                  <a:srgbClr val="17181A"/>
-                </a:solidFill>
-                <a:latin typeface="Verdana"/>
-              </a:rPr>
-              <a:t>Je me sens mieux, mais je finis la boîte.</a:t>
-            </a:r>
-          </a:p>
-        </p:txBody>
-      </p:sp>
-      <p:sp>
-        <p:nvSpPr>
-          <p:cNvPr id="13" name="Rounded Rectangle 12"/>
-          <p:cNvSpPr/>
-          <p:nvPr/>
-        </p:nvSpPr>
-        <p:spPr>
-          <a:xfrm>
-            <a:off x="566928" y="4462272"/>
-            <a:ext cx="11057839" cy="1618487"/>
-          </a:xfrm>
-          <a:prstGeom prst="roundRect">
-            <a:avLst>
-              <a:gd name="adj" fmla="val 9039"/>
-            </a:avLst>
-          </a:prstGeom>
-          <a:solidFill>
-            <a:srgbClr val="FFFFFF"/>
           </a:solidFill>
           <a:ln w="12700">
             <a:solidFill>
@@ -6732,14 +6771,58 @@
       </p:sp>
       <p:sp>
         <p:nvSpPr>
-          <p:cNvPr id="14" name="TextBox 13"/>
+          <p:cNvPr id="9" name="Rounded Rectangle 8"/>
+          <p:cNvSpPr/>
+          <p:nvPr/>
+        </p:nvSpPr>
+        <p:spPr>
+          <a:xfrm>
+            <a:off x="841247" y="2450083"/>
+            <a:ext cx="365760" cy="365760"/>
+          </a:xfrm>
+          <a:prstGeom prst="roundRect">
+            <a:avLst>
+              <a:gd name="adj" fmla="val 32500"/>
+            </a:avLst>
+          </a:prstGeom>
+          <a:solidFill>
+            <a:srgbClr val="E7F0F6"/>
+          </a:solidFill>
+          <a:ln>
+            <a:noFill/>
+          </a:ln>
+          <a:effectLst/>
+        </p:spPr>
+        <p:style>
+          <a:lnRef idx="1">
+            <a:schemeClr val="accent1"/>
+          </a:lnRef>
+          <a:fillRef idx="3">
+            <a:schemeClr val="accent1"/>
+          </a:fillRef>
+          <a:effectRef idx="2">
+            <a:schemeClr val="accent1"/>
+          </a:effectRef>
+          <a:fontRef idx="minor">
+            <a:schemeClr val="lt1"/>
+          </a:fontRef>
+        </p:style>
+        <p:txBody>
+          <a:bodyPr rtlCol="0" anchor="ctr"/>
+          <a:lstStyle/>
+          <a:p/>
+        </p:txBody>
+      </p:sp>
+      <p:sp>
+        <p:nvSpPr>
+          <p:cNvPr id="10" name="TextBox 9"/>
           <p:cNvSpPr txBox="1"/>
           <p:nvPr/>
         </p:nvSpPr>
         <p:spPr>
           <a:xfrm>
-            <a:off x="969264" y="4736592"/>
-            <a:ext cx="10234879" cy="1150620"/>
+            <a:off x="841247" y="2514091"/>
+            <a:ext cx="365760" cy="256032"/>
           </a:xfrm>
           <a:prstGeom prst="rect">
             <a:avLst/>
@@ -6752,19 +6835,421 @@
           </a:bodyPr>
           <a:lstStyle/>
           <a:p>
+            <a:pPr algn="ctr">
+              <a:lnSpc>
+                <a:spcPct val="135000"/>
+              </a:lnSpc>
+            </a:pPr>
+            <a:r>
+              <a:rPr sz="1500" b="1" i="0">
+                <a:solidFill>
+                  <a:srgbClr val="1D6B8F"/>
+                </a:solidFill>
+                <a:latin typeface="Verdana"/>
+              </a:rPr>
+              <a:t>1</a:t>
+            </a:r>
+          </a:p>
+        </p:txBody>
+      </p:sp>
+      <p:sp>
+        <p:nvSpPr>
+          <p:cNvPr id="11" name="TextBox 10"/>
+          <p:cNvSpPr txBox="1"/>
+          <p:nvPr/>
+        </p:nvSpPr>
+        <p:spPr>
+          <a:xfrm>
+            <a:off x="1344168" y="2295144"/>
+            <a:ext cx="10097719" cy="712215"/>
+          </a:xfrm>
+          <a:prstGeom prst="rect">
+            <a:avLst/>
+          </a:prstGeom>
+          <a:noFill/>
+        </p:spPr>
+        <p:txBody>
+          <a:bodyPr wrap="square" lIns="0" rIns="0" tIns="0" bIns="0" anchor="t">
+            <a:spAutoFit/>
+          </a:bodyPr>
+          <a:lstStyle/>
+          <a:p>
             <a:pPr algn="l">
               <a:lnSpc>
-                <a:spcPct val="145000"/>
+                <a:spcPct val="140000"/>
               </a:lnSpc>
             </a:pPr>
             <a:r>
-              <a:rPr sz="2000" b="0" i="0">
-                <a:solidFill>
-                  <a:srgbClr val="4B4F52"/>
-                </a:solidFill>
-                <a:latin typeface="Verdana"/>
-              </a:rPr>
-              <a:t>Se sentir mieux au troisième jour est normal et attendu. L'infection n'est pas finie pour autant : c'est la raison même pour laquelle le pharmacien dit « pendant sept jours » plutôt que « jusqu'à ce que ça aille mieux ».</a:t>
+              <a:rPr sz="1900" b="0" i="0">
+                <a:solidFill>
+                  <a:srgbClr val="3A3D40"/>
+                </a:solidFill>
+                <a:latin typeface="Verdana"/>
+              </a:rPr>
+              <a:t>« Prenez un comprimé par jour. »   </a:t>
+            </a:r>
+            <a:r>
+              <a:rPr sz="1900" b="1" i="0">
+                <a:solidFill>
+                  <a:srgbClr val="07734A"/>
+                </a:solidFill>
+                <a:latin typeface="Verdana"/>
+              </a:rPr>
+              <a:t>» Pendant combien de temps ? / À quel moment de la journée ?</a:t>
+            </a:r>
+          </a:p>
+        </p:txBody>
+      </p:sp>
+      <p:sp>
+        <p:nvSpPr>
+          <p:cNvPr id="12" name="Rounded Rectangle 11"/>
+          <p:cNvSpPr/>
+          <p:nvPr/>
+        </p:nvSpPr>
+        <p:spPr>
+          <a:xfrm>
+            <a:off x="566928" y="3254248"/>
+            <a:ext cx="11057839" cy="986535"/>
+          </a:xfrm>
+          <a:prstGeom prst="roundRect">
+            <a:avLst>
+              <a:gd name="adj" fmla="val 14830"/>
+            </a:avLst>
+          </a:prstGeom>
+          <a:solidFill>
+            <a:srgbClr val="E6F5EE"/>
+          </a:solidFill>
+          <a:ln w="12700">
+            <a:solidFill>
+              <a:srgbClr val="EAEAE8"/>
+            </a:solidFill>
+          </a:ln>
+          <a:effectLst/>
+        </p:spPr>
+        <p:style>
+          <a:lnRef idx="1">
+            <a:schemeClr val="accent1"/>
+          </a:lnRef>
+          <a:fillRef idx="3">
+            <a:schemeClr val="accent1"/>
+          </a:fillRef>
+          <a:effectRef idx="2">
+            <a:schemeClr val="accent1"/>
+          </a:effectRef>
+          <a:fontRef idx="minor">
+            <a:schemeClr val="lt1"/>
+          </a:fontRef>
+        </p:style>
+        <p:txBody>
+          <a:bodyPr rtlCol="0" anchor="ctr"/>
+          <a:lstStyle/>
+          <a:p/>
+        </p:txBody>
+      </p:sp>
+      <p:sp>
+        <p:nvSpPr>
+          <p:cNvPr id="13" name="Rounded Rectangle 12"/>
+          <p:cNvSpPr/>
+          <p:nvPr/>
+        </p:nvSpPr>
+        <p:spPr>
+          <a:xfrm>
+            <a:off x="841247" y="3564635"/>
+            <a:ext cx="365760" cy="365760"/>
+          </a:xfrm>
+          <a:prstGeom prst="roundRect">
+            <a:avLst>
+              <a:gd name="adj" fmla="val 32500"/>
+            </a:avLst>
+          </a:prstGeom>
+          <a:solidFill>
+            <a:srgbClr val="E7F0F6"/>
+          </a:solidFill>
+          <a:ln>
+            <a:noFill/>
+          </a:ln>
+          <a:effectLst/>
+        </p:spPr>
+        <p:style>
+          <a:lnRef idx="1">
+            <a:schemeClr val="accent1"/>
+          </a:lnRef>
+          <a:fillRef idx="3">
+            <a:schemeClr val="accent1"/>
+          </a:fillRef>
+          <a:effectRef idx="2">
+            <a:schemeClr val="accent1"/>
+          </a:effectRef>
+          <a:fontRef idx="minor">
+            <a:schemeClr val="lt1"/>
+          </a:fontRef>
+        </p:style>
+        <p:txBody>
+          <a:bodyPr rtlCol="0" anchor="ctr"/>
+          <a:lstStyle/>
+          <a:p/>
+        </p:txBody>
+      </p:sp>
+      <p:sp>
+        <p:nvSpPr>
+          <p:cNvPr id="14" name="TextBox 13"/>
+          <p:cNvSpPr txBox="1"/>
+          <p:nvPr/>
+        </p:nvSpPr>
+        <p:spPr>
+          <a:xfrm>
+            <a:off x="841247" y="3628643"/>
+            <a:ext cx="365760" cy="256032"/>
+          </a:xfrm>
+          <a:prstGeom prst="rect">
+            <a:avLst/>
+          </a:prstGeom>
+          <a:noFill/>
+        </p:spPr>
+        <p:txBody>
+          <a:bodyPr wrap="square" lIns="0" rIns="0" tIns="0" bIns="0" anchor="t">
+            <a:spAutoFit/>
+          </a:bodyPr>
+          <a:lstStyle/>
+          <a:p>
+            <a:pPr algn="ctr">
+              <a:lnSpc>
+                <a:spcPct val="135000"/>
+              </a:lnSpc>
+            </a:pPr>
+            <a:r>
+              <a:rPr sz="1500" b="1" i="0">
+                <a:solidFill>
+                  <a:srgbClr val="1D6B8F"/>
+                </a:solidFill>
+                <a:latin typeface="Verdana"/>
+              </a:rPr>
+              <a:t>2</a:t>
+            </a:r>
+          </a:p>
+        </p:txBody>
+      </p:sp>
+      <p:sp>
+        <p:nvSpPr>
+          <p:cNvPr id="15" name="TextBox 14"/>
+          <p:cNvSpPr txBox="1"/>
+          <p:nvPr/>
+        </p:nvSpPr>
+        <p:spPr>
+          <a:xfrm>
+            <a:off x="1344168" y="3409696"/>
+            <a:ext cx="10097719" cy="712215"/>
+          </a:xfrm>
+          <a:prstGeom prst="rect">
+            <a:avLst/>
+          </a:prstGeom>
+          <a:noFill/>
+        </p:spPr>
+        <p:txBody>
+          <a:bodyPr wrap="square" lIns="0" rIns="0" tIns="0" bIns="0" anchor="t">
+            <a:spAutoFit/>
+          </a:bodyPr>
+          <a:lstStyle/>
+          <a:p>
+            <a:pPr algn="l">
+              <a:lnSpc>
+                <a:spcPct val="140000"/>
+              </a:lnSpc>
+            </a:pPr>
+            <a:r>
+              <a:rPr sz="1900" b="0" i="0">
+                <a:solidFill>
+                  <a:srgbClr val="3A3D40"/>
+                </a:solidFill>
+                <a:latin typeface="Verdana"/>
+              </a:rPr>
+              <a:t>« Deux fois par jour, pendant dix jours. »   </a:t>
+            </a:r>
+            <a:r>
+              <a:rPr sz="1900" b="1" i="0">
+                <a:solidFill>
+                  <a:srgbClr val="07734A"/>
+                </a:solidFill>
+                <a:latin typeface="Verdana"/>
+              </a:rPr>
+              <a:t>» Combien de comprimés à la fois ? / Avec ou sans nourriture ?</a:t>
+            </a:r>
+          </a:p>
+        </p:txBody>
+      </p:sp>
+      <p:sp>
+        <p:nvSpPr>
+          <p:cNvPr id="16" name="Rounded Rectangle 15"/>
+          <p:cNvSpPr/>
+          <p:nvPr/>
+        </p:nvSpPr>
+        <p:spPr>
+          <a:xfrm>
+            <a:off x="566928" y="4368800"/>
+            <a:ext cx="11057839" cy="986535"/>
+          </a:xfrm>
+          <a:prstGeom prst="roundRect">
+            <a:avLst>
+              <a:gd name="adj" fmla="val 14830"/>
+            </a:avLst>
+          </a:prstGeom>
+          <a:solidFill>
+            <a:srgbClr val="E6F5EE"/>
+          </a:solidFill>
+          <a:ln w="12700">
+            <a:solidFill>
+              <a:srgbClr val="EAEAE8"/>
+            </a:solidFill>
+          </a:ln>
+          <a:effectLst/>
+        </p:spPr>
+        <p:style>
+          <a:lnRef idx="1">
+            <a:schemeClr val="accent1"/>
+          </a:lnRef>
+          <a:fillRef idx="3">
+            <a:schemeClr val="accent1"/>
+          </a:fillRef>
+          <a:effectRef idx="2">
+            <a:schemeClr val="accent1"/>
+          </a:effectRef>
+          <a:fontRef idx="minor">
+            <a:schemeClr val="lt1"/>
+          </a:fontRef>
+        </p:style>
+        <p:txBody>
+          <a:bodyPr rtlCol="0" anchor="ctr"/>
+          <a:lstStyle/>
+          <a:p/>
+        </p:txBody>
+      </p:sp>
+      <p:sp>
+        <p:nvSpPr>
+          <p:cNvPr id="17" name="Rounded Rectangle 16"/>
+          <p:cNvSpPr/>
+          <p:nvPr/>
+        </p:nvSpPr>
+        <p:spPr>
+          <a:xfrm>
+            <a:off x="841247" y="4679188"/>
+            <a:ext cx="365760" cy="365760"/>
+          </a:xfrm>
+          <a:prstGeom prst="roundRect">
+            <a:avLst>
+              <a:gd name="adj" fmla="val 32500"/>
+            </a:avLst>
+          </a:prstGeom>
+          <a:solidFill>
+            <a:srgbClr val="E7F0F6"/>
+          </a:solidFill>
+          <a:ln>
+            <a:noFill/>
+          </a:ln>
+          <a:effectLst/>
+        </p:spPr>
+        <p:style>
+          <a:lnRef idx="1">
+            <a:schemeClr val="accent1"/>
+          </a:lnRef>
+          <a:fillRef idx="3">
+            <a:schemeClr val="accent1"/>
+          </a:fillRef>
+          <a:effectRef idx="2">
+            <a:schemeClr val="accent1"/>
+          </a:effectRef>
+          <a:fontRef idx="minor">
+            <a:schemeClr val="lt1"/>
+          </a:fontRef>
+        </p:style>
+        <p:txBody>
+          <a:bodyPr rtlCol="0" anchor="ctr"/>
+          <a:lstStyle/>
+          <a:p/>
+        </p:txBody>
+      </p:sp>
+      <p:sp>
+        <p:nvSpPr>
+          <p:cNvPr id="18" name="TextBox 17"/>
+          <p:cNvSpPr txBox="1"/>
+          <p:nvPr/>
+        </p:nvSpPr>
+        <p:spPr>
+          <a:xfrm>
+            <a:off x="841247" y="4743196"/>
+            <a:ext cx="365760" cy="256032"/>
+          </a:xfrm>
+          <a:prstGeom prst="rect">
+            <a:avLst/>
+          </a:prstGeom>
+          <a:noFill/>
+        </p:spPr>
+        <p:txBody>
+          <a:bodyPr wrap="square" lIns="0" rIns="0" tIns="0" bIns="0" anchor="t">
+            <a:spAutoFit/>
+          </a:bodyPr>
+          <a:lstStyle/>
+          <a:p>
+            <a:pPr algn="ctr">
+              <a:lnSpc>
+                <a:spcPct val="135000"/>
+              </a:lnSpc>
+            </a:pPr>
+            <a:r>
+              <a:rPr sz="1500" b="1" i="0">
+                <a:solidFill>
+                  <a:srgbClr val="1D6B8F"/>
+                </a:solidFill>
+                <a:latin typeface="Verdana"/>
+              </a:rPr>
+              <a:t>3</a:t>
+            </a:r>
+          </a:p>
+        </p:txBody>
+      </p:sp>
+      <p:sp>
+        <p:nvSpPr>
+          <p:cNvPr id="19" name="TextBox 18"/>
+          <p:cNvSpPr txBox="1"/>
+          <p:nvPr/>
+        </p:nvSpPr>
+        <p:spPr>
+          <a:xfrm>
+            <a:off x="1344168" y="4524248"/>
+            <a:ext cx="10097719" cy="712215"/>
+          </a:xfrm>
+          <a:prstGeom prst="rect">
+            <a:avLst/>
+          </a:prstGeom>
+          <a:noFill/>
+        </p:spPr>
+        <p:txBody>
+          <a:bodyPr wrap="square" lIns="0" rIns="0" tIns="0" bIns="0" anchor="t">
+            <a:spAutoFit/>
+          </a:bodyPr>
+          <a:lstStyle/>
+          <a:p>
+            <a:pPr algn="l">
+              <a:lnSpc>
+                <a:spcPct val="140000"/>
+              </a:lnSpc>
+            </a:pPr>
+            <a:r>
+              <a:rPr sz="1900" b="0" i="0">
+                <a:solidFill>
+                  <a:srgbClr val="3A3D40"/>
+                </a:solidFill>
+                <a:latin typeface="Verdana"/>
+              </a:rPr>
+              <a:t>« Un comprimé le matin, pendant une semaine. »   </a:t>
+            </a:r>
+            <a:r>
+              <a:rPr sz="1900" b="1" i="0">
+                <a:solidFill>
+                  <a:srgbClr val="07734A"/>
+                </a:solidFill>
+                <a:latin typeface="Verdana"/>
+              </a:rPr>
+              <a:t>» Est-ce que je peux boire de l'alcool ? / Le prendre en mangeant ?</a:t>
             </a:r>
           </a:p>
         </p:txBody>
@@ -6941,7 +7426,7 @@
                 </a:solidFill>
                 <a:latin typeface="Verdana"/>
               </a:rPr>
-              <a:t>PRATIQUE · 4 DE 4</a:t>
+              <a:t>LE PIÈGE DU « JE VAIS MIEUX »</a:t>
             </a:r>
           </a:p>
         </p:txBody>
@@ -6980,21 +7465,67 @@
                 </a:solidFill>
                 <a:latin typeface="Verdana"/>
               </a:rPr>
-              <a:t>Votre propre étiquette</a:t>
-            </a:r>
-          </a:p>
-        </p:txBody>
-      </p:sp>
-      <p:sp>
-        <p:nvSpPr>
-          <p:cNvPr id="7" name="TextBox 6"/>
+              <a:t>Le piège le plus fréquent</a:t>
+            </a:r>
+          </a:p>
+        </p:txBody>
+      </p:sp>
+      <p:sp>
+        <p:nvSpPr>
+          <p:cNvPr id="7" name="Rounded Rectangle 6"/>
+          <p:cNvSpPr/>
+          <p:nvPr/>
+        </p:nvSpPr>
+        <p:spPr>
+          <a:xfrm>
+            <a:off x="566928" y="1856232"/>
+            <a:ext cx="5428335" cy="2331720"/>
+          </a:xfrm>
+          <a:prstGeom prst="roundRect">
+            <a:avLst>
+              <a:gd name="adj" fmla="val 6274"/>
+            </a:avLst>
+          </a:prstGeom>
+          <a:solidFill>
+            <a:srgbClr val="FFF6F5"/>
+          </a:solidFill>
+          <a:ln w="12700">
+            <a:solidFill>
+              <a:srgbClr val="DC2626"/>
+            </a:solidFill>
+          </a:ln>
+          <a:effectLst/>
+        </p:spPr>
+        <p:style>
+          <a:lnRef idx="1">
+            <a:schemeClr val="accent1"/>
+          </a:lnRef>
+          <a:fillRef idx="3">
+            <a:schemeClr val="accent1"/>
+          </a:fillRef>
+          <a:effectRef idx="2">
+            <a:schemeClr val="accent1"/>
+          </a:effectRef>
+          <a:fontRef idx="minor">
+            <a:schemeClr val="lt1"/>
+          </a:fontRef>
+        </p:style>
+        <p:txBody>
+          <a:bodyPr rtlCol="0" anchor="ctr"/>
+          <a:lstStyle/>
+          <a:p/>
+        </p:txBody>
+      </p:sp>
+      <p:sp>
+        <p:nvSpPr>
+          <p:cNvPr id="8" name="TextBox 7"/>
           <p:cNvSpPr txBox="1"/>
           <p:nvPr/>
         </p:nvSpPr>
         <p:spPr>
           <a:xfrm>
-            <a:off x="566928" y="1645920"/>
-            <a:ext cx="11057839" cy="329184"/>
+            <a:off x="932688" y="2130552"/>
+            <a:ext cx="4696815" cy="274320"/>
           </a:xfrm>
           <a:prstGeom prst="rect">
             <a:avLst/>
@@ -7013,31 +7544,194 @@
               </a:lnSpc>
             </a:pPr>
             <a:r>
-              <a:rPr sz="1800" b="0" i="0">
-                <a:solidFill>
-                  <a:srgbClr val="6E7175"/>
-                </a:solidFill>
-                <a:latin typeface="Verdana"/>
-              </a:rPr>
-              <a:t>Prenez une boîte que vous avez chez vous, ou celle du groupe.</a:t>
-            </a:r>
-          </a:p>
-        </p:txBody>
-      </p:sp>
-      <p:sp>
-        <p:nvSpPr>
-          <p:cNvPr id="8" name="Rounded Rectangle 7"/>
+              <a:rPr sz="1300" b="1" i="0" spc="156">
+                <a:solidFill>
+                  <a:srgbClr val="B91C1C"/>
+                </a:solidFill>
+                <a:latin typeface="Verdana"/>
+              </a:rPr>
+              <a:t>ON ENTEND SOUVENT</a:t>
+            </a:r>
+          </a:p>
+        </p:txBody>
+      </p:sp>
+      <p:sp>
+        <p:nvSpPr>
+          <p:cNvPr id="9" name="TextBox 8"/>
+          <p:cNvSpPr txBox="1"/>
+          <p:nvPr/>
+        </p:nvSpPr>
+        <p:spPr>
+          <a:xfrm>
+            <a:off x="932688" y="2569464"/>
+            <a:ext cx="4696815" cy="1417320"/>
+          </a:xfrm>
+          <a:prstGeom prst="rect">
+            <a:avLst/>
+          </a:prstGeom>
+          <a:noFill/>
+        </p:spPr>
+        <p:txBody>
+          <a:bodyPr wrap="square" lIns="0" rIns="0" tIns="0" bIns="0" anchor="t">
+            <a:spAutoFit/>
+          </a:bodyPr>
+          <a:lstStyle/>
+          <a:p>
+            <a:pPr algn="l">
+              <a:lnSpc>
+                <a:spcPct val="130000"/>
+              </a:lnSpc>
+            </a:pPr>
+            <a:r>
+              <a:rPr sz="2500" b="1" i="0">
+                <a:solidFill>
+                  <a:srgbClr val="17181A"/>
+                </a:solidFill>
+                <a:latin typeface="Verdana"/>
+              </a:rPr>
+              <a:t>Je me sens mieux, j'arrête les antibiotiques.</a:t>
+            </a:r>
+          </a:p>
+        </p:txBody>
+      </p:sp>
+      <p:sp>
+        <p:nvSpPr>
+          <p:cNvPr id="10" name="Rounded Rectangle 9"/>
           <p:cNvSpPr/>
           <p:nvPr/>
         </p:nvSpPr>
         <p:spPr>
           <a:xfrm>
-            <a:off x="566928" y="2139696"/>
-            <a:ext cx="11057839" cy="648716"/>
+            <a:off x="6196431" y="1856232"/>
+            <a:ext cx="5428335" cy="2331720"/>
           </a:xfrm>
           <a:prstGeom prst="roundRect">
             <a:avLst>
-              <a:gd name="adj" fmla="val 22552"/>
+              <a:gd name="adj" fmla="val 6274"/>
+            </a:avLst>
+          </a:prstGeom>
+          <a:solidFill>
+            <a:srgbClr val="E6F5EE"/>
+          </a:solidFill>
+          <a:ln w="12700">
+            <a:solidFill>
+              <a:srgbClr val="0A8F5B"/>
+            </a:solidFill>
+          </a:ln>
+          <a:effectLst/>
+        </p:spPr>
+        <p:style>
+          <a:lnRef idx="1">
+            <a:schemeClr val="accent1"/>
+          </a:lnRef>
+          <a:fillRef idx="3">
+            <a:schemeClr val="accent1"/>
+          </a:fillRef>
+          <a:effectRef idx="2">
+            <a:schemeClr val="accent1"/>
+          </a:effectRef>
+          <a:fontRef idx="minor">
+            <a:schemeClr val="lt1"/>
+          </a:fontRef>
+        </p:style>
+        <p:txBody>
+          <a:bodyPr rtlCol="0" anchor="ctr"/>
+          <a:lstStyle/>
+          <a:p/>
+        </p:txBody>
+      </p:sp>
+      <p:sp>
+        <p:nvSpPr>
+          <p:cNvPr id="11" name="TextBox 10"/>
+          <p:cNvSpPr txBox="1"/>
+          <p:nvPr/>
+        </p:nvSpPr>
+        <p:spPr>
+          <a:xfrm>
+            <a:off x="6562191" y="2130552"/>
+            <a:ext cx="4696815" cy="274320"/>
+          </a:xfrm>
+          <a:prstGeom prst="rect">
+            <a:avLst/>
+          </a:prstGeom>
+          <a:noFill/>
+        </p:spPr>
+        <p:txBody>
+          <a:bodyPr wrap="square" lIns="0" rIns="0" tIns="0" bIns="0" anchor="t">
+            <a:spAutoFit/>
+          </a:bodyPr>
+          <a:lstStyle/>
+          <a:p>
+            <a:pPr algn="l">
+              <a:lnSpc>
+                <a:spcPct val="135000"/>
+              </a:lnSpc>
+            </a:pPr>
+            <a:r>
+              <a:rPr sz="1300" b="1" i="0" spc="156">
+                <a:solidFill>
+                  <a:srgbClr val="07734A"/>
+                </a:solidFill>
+                <a:latin typeface="Verdana"/>
+              </a:rPr>
+              <a:t>IL FAUT DIRE PLUTÔT</a:t>
+            </a:r>
+          </a:p>
+        </p:txBody>
+      </p:sp>
+      <p:sp>
+        <p:nvSpPr>
+          <p:cNvPr id="12" name="TextBox 11"/>
+          <p:cNvSpPr txBox="1"/>
+          <p:nvPr/>
+        </p:nvSpPr>
+        <p:spPr>
+          <a:xfrm>
+            <a:off x="6562191" y="2569464"/>
+            <a:ext cx="4696815" cy="1417320"/>
+          </a:xfrm>
+          <a:prstGeom prst="rect">
+            <a:avLst/>
+          </a:prstGeom>
+          <a:noFill/>
+        </p:spPr>
+        <p:txBody>
+          <a:bodyPr wrap="square" lIns="0" rIns="0" tIns="0" bIns="0" anchor="t">
+            <a:spAutoFit/>
+          </a:bodyPr>
+          <a:lstStyle/>
+          <a:p>
+            <a:pPr algn="l">
+              <a:lnSpc>
+                <a:spcPct val="130000"/>
+              </a:lnSpc>
+            </a:pPr>
+            <a:r>
+              <a:rPr sz="2500" b="1" i="0">
+                <a:solidFill>
+                  <a:srgbClr val="17181A"/>
+                </a:solidFill>
+                <a:latin typeface="Verdana"/>
+              </a:rPr>
+              <a:t>Je me sens mieux, mais je finis la boîte.</a:t>
+            </a:r>
+          </a:p>
+        </p:txBody>
+      </p:sp>
+      <p:sp>
+        <p:nvSpPr>
+          <p:cNvPr id="13" name="Rounded Rectangle 12"/>
+          <p:cNvSpPr/>
+          <p:nvPr/>
+        </p:nvSpPr>
+        <p:spPr>
+          <a:xfrm>
+            <a:off x="566928" y="4462272"/>
+            <a:ext cx="11057839" cy="1618487"/>
+          </a:xfrm>
+          <a:prstGeom prst="roundRect">
+            <a:avLst>
+              <a:gd name="adj" fmla="val 9039"/>
             </a:avLst>
           </a:prstGeom>
           <a:solidFill>
@@ -7072,58 +7766,14 @@
       </p:sp>
       <p:sp>
         <p:nvSpPr>
-          <p:cNvPr id="9" name="Rounded Rectangle 8"/>
-          <p:cNvSpPr/>
-          <p:nvPr/>
-        </p:nvSpPr>
-        <p:spPr>
-          <a:xfrm>
-            <a:off x="841247" y="2281174"/>
-            <a:ext cx="365760" cy="365760"/>
-          </a:xfrm>
-          <a:prstGeom prst="roundRect">
-            <a:avLst>
-              <a:gd name="adj" fmla="val 32500"/>
-            </a:avLst>
-          </a:prstGeom>
-          <a:solidFill>
-            <a:srgbClr val="E7F0F6"/>
-          </a:solidFill>
-          <a:ln>
-            <a:noFill/>
-          </a:ln>
-          <a:effectLst/>
-        </p:spPr>
-        <p:style>
-          <a:lnRef idx="1">
-            <a:schemeClr val="accent1"/>
-          </a:lnRef>
-          <a:fillRef idx="3">
-            <a:schemeClr val="accent1"/>
-          </a:fillRef>
-          <a:effectRef idx="2">
-            <a:schemeClr val="accent1"/>
-          </a:effectRef>
-          <a:fontRef idx="minor">
-            <a:schemeClr val="lt1"/>
-          </a:fontRef>
-        </p:style>
-        <p:txBody>
-          <a:bodyPr rtlCol="0" anchor="ctr"/>
-          <a:lstStyle/>
-          <a:p/>
-        </p:txBody>
-      </p:sp>
-      <p:sp>
-        <p:nvSpPr>
-          <p:cNvPr id="10" name="TextBox 9"/>
+          <p:cNvPr id="14" name="TextBox 13"/>
           <p:cNvSpPr txBox="1"/>
           <p:nvPr/>
         </p:nvSpPr>
         <p:spPr>
           <a:xfrm>
-            <a:off x="841247" y="2345182"/>
-            <a:ext cx="365760" cy="256032"/>
+            <a:off x="969264" y="4736592"/>
+            <a:ext cx="10234879" cy="1150620"/>
           </a:xfrm>
           <a:prstGeom prst="rect">
             <a:avLst/>
@@ -7136,562 +7786,19 @@
           </a:bodyPr>
           <a:lstStyle/>
           <a:p>
-            <a:pPr algn="ctr">
+            <a:pPr algn="l">
               <a:lnSpc>
-                <a:spcPct val="135000"/>
+                <a:spcPct val="145000"/>
               </a:lnSpc>
             </a:pPr>
             <a:r>
-              <a:rPr sz="1500" b="1" i="0">
-                <a:solidFill>
-                  <a:srgbClr val="1D6B8F"/>
-                </a:solidFill>
-                <a:latin typeface="Verdana"/>
-              </a:rPr>
-              <a:t>1</a:t>
-            </a:r>
-          </a:p>
-        </p:txBody>
-      </p:sp>
-      <p:sp>
-        <p:nvSpPr>
-          <p:cNvPr id="11" name="TextBox 10"/>
-          <p:cNvSpPr txBox="1"/>
-          <p:nvPr/>
-        </p:nvSpPr>
-        <p:spPr>
-          <a:xfrm>
-            <a:off x="1344168" y="2295144"/>
-            <a:ext cx="10097719" cy="374396"/>
-          </a:xfrm>
-          <a:prstGeom prst="rect">
-            <a:avLst/>
-          </a:prstGeom>
-          <a:noFill/>
-        </p:spPr>
-        <p:txBody>
-          <a:bodyPr wrap="square" lIns="0" rIns="0" tIns="0" bIns="0" anchor="t">
-            <a:spAutoFit/>
-          </a:bodyPr>
-          <a:lstStyle/>
-          <a:p>
-            <a:pPr algn="l">
-              <a:lnSpc>
-                <a:spcPct val="140000"/>
-              </a:lnSpc>
-            </a:pPr>
-            <a:r>
-              <a:rPr sz="1900" b="0" i="0">
-                <a:solidFill>
-                  <a:srgbClr val="3A3D40"/>
-                </a:solidFill>
-                <a:latin typeface="Verdana"/>
-              </a:rPr>
-              <a:t>Combien ?</a:t>
-            </a:r>
-          </a:p>
-        </p:txBody>
-      </p:sp>
-      <p:sp>
-        <p:nvSpPr>
-          <p:cNvPr id="12" name="Rounded Rectangle 11"/>
-          <p:cNvSpPr/>
-          <p:nvPr/>
-        </p:nvSpPr>
-        <p:spPr>
-          <a:xfrm>
-            <a:off x="566928" y="2916428"/>
-            <a:ext cx="11057839" cy="648716"/>
-          </a:xfrm>
-          <a:prstGeom prst="roundRect">
-            <a:avLst>
-              <a:gd name="adj" fmla="val 22552"/>
-            </a:avLst>
-          </a:prstGeom>
-          <a:solidFill>
-            <a:srgbClr val="FFFFFF"/>
-          </a:solidFill>
-          <a:ln w="12700">
-            <a:solidFill>
-              <a:srgbClr val="EAEAE8"/>
-            </a:solidFill>
-          </a:ln>
-          <a:effectLst/>
-        </p:spPr>
-        <p:style>
-          <a:lnRef idx="1">
-            <a:schemeClr val="accent1"/>
-          </a:lnRef>
-          <a:fillRef idx="3">
-            <a:schemeClr val="accent1"/>
-          </a:fillRef>
-          <a:effectRef idx="2">
-            <a:schemeClr val="accent1"/>
-          </a:effectRef>
-          <a:fontRef idx="minor">
-            <a:schemeClr val="lt1"/>
-          </a:fontRef>
-        </p:style>
-        <p:txBody>
-          <a:bodyPr rtlCol="0" anchor="ctr"/>
-          <a:lstStyle/>
-          <a:p/>
-        </p:txBody>
-      </p:sp>
-      <p:sp>
-        <p:nvSpPr>
-          <p:cNvPr id="13" name="Rounded Rectangle 12"/>
-          <p:cNvSpPr/>
-          <p:nvPr/>
-        </p:nvSpPr>
-        <p:spPr>
-          <a:xfrm>
-            <a:off x="841247" y="3057905"/>
-            <a:ext cx="365760" cy="365760"/>
-          </a:xfrm>
-          <a:prstGeom prst="roundRect">
-            <a:avLst>
-              <a:gd name="adj" fmla="val 32500"/>
-            </a:avLst>
-          </a:prstGeom>
-          <a:solidFill>
-            <a:srgbClr val="E7F0F6"/>
-          </a:solidFill>
-          <a:ln>
-            <a:noFill/>
-          </a:ln>
-          <a:effectLst/>
-        </p:spPr>
-        <p:style>
-          <a:lnRef idx="1">
-            <a:schemeClr val="accent1"/>
-          </a:lnRef>
-          <a:fillRef idx="3">
-            <a:schemeClr val="accent1"/>
-          </a:fillRef>
-          <a:effectRef idx="2">
-            <a:schemeClr val="accent1"/>
-          </a:effectRef>
-          <a:fontRef idx="minor">
-            <a:schemeClr val="lt1"/>
-          </a:fontRef>
-        </p:style>
-        <p:txBody>
-          <a:bodyPr rtlCol="0" anchor="ctr"/>
-          <a:lstStyle/>
-          <a:p/>
-        </p:txBody>
-      </p:sp>
-      <p:sp>
-        <p:nvSpPr>
-          <p:cNvPr id="14" name="TextBox 13"/>
-          <p:cNvSpPr txBox="1"/>
-          <p:nvPr/>
-        </p:nvSpPr>
-        <p:spPr>
-          <a:xfrm>
-            <a:off x="841247" y="3121913"/>
-            <a:ext cx="365760" cy="256032"/>
-          </a:xfrm>
-          <a:prstGeom prst="rect">
-            <a:avLst/>
-          </a:prstGeom>
-          <a:noFill/>
-        </p:spPr>
-        <p:txBody>
-          <a:bodyPr wrap="square" lIns="0" rIns="0" tIns="0" bIns="0" anchor="t">
-            <a:spAutoFit/>
-          </a:bodyPr>
-          <a:lstStyle/>
-          <a:p>
-            <a:pPr algn="ctr">
-              <a:lnSpc>
-                <a:spcPct val="135000"/>
-              </a:lnSpc>
-            </a:pPr>
-            <a:r>
-              <a:rPr sz="1500" b="1" i="0">
-                <a:solidFill>
-                  <a:srgbClr val="1D6B8F"/>
-                </a:solidFill>
-                <a:latin typeface="Verdana"/>
-              </a:rPr>
-              <a:t>2</a:t>
-            </a:r>
-          </a:p>
-        </p:txBody>
-      </p:sp>
-      <p:sp>
-        <p:nvSpPr>
-          <p:cNvPr id="15" name="TextBox 14"/>
-          <p:cNvSpPr txBox="1"/>
-          <p:nvPr/>
-        </p:nvSpPr>
-        <p:spPr>
-          <a:xfrm>
-            <a:off x="1344168" y="3071876"/>
-            <a:ext cx="10097719" cy="374396"/>
-          </a:xfrm>
-          <a:prstGeom prst="rect">
-            <a:avLst/>
-          </a:prstGeom>
-          <a:noFill/>
-        </p:spPr>
-        <p:txBody>
-          <a:bodyPr wrap="square" lIns="0" rIns="0" tIns="0" bIns="0" anchor="t">
-            <a:spAutoFit/>
-          </a:bodyPr>
-          <a:lstStyle/>
-          <a:p>
-            <a:pPr algn="l">
-              <a:lnSpc>
-                <a:spcPct val="140000"/>
-              </a:lnSpc>
-            </a:pPr>
-            <a:r>
-              <a:rPr sz="1900" b="0" i="0">
-                <a:solidFill>
-                  <a:srgbClr val="3A3D40"/>
-                </a:solidFill>
-                <a:latin typeface="Verdana"/>
-              </a:rPr>
-              <a:t>Quand ?</a:t>
-            </a:r>
-          </a:p>
-        </p:txBody>
-      </p:sp>
-      <p:sp>
-        <p:nvSpPr>
-          <p:cNvPr id="16" name="Rounded Rectangle 15"/>
-          <p:cNvSpPr/>
-          <p:nvPr/>
-        </p:nvSpPr>
-        <p:spPr>
-          <a:xfrm>
-            <a:off x="566928" y="3693160"/>
-            <a:ext cx="11057839" cy="648716"/>
-          </a:xfrm>
-          <a:prstGeom prst="roundRect">
-            <a:avLst>
-              <a:gd name="adj" fmla="val 22552"/>
-            </a:avLst>
-          </a:prstGeom>
-          <a:solidFill>
-            <a:srgbClr val="FFFFFF"/>
-          </a:solidFill>
-          <a:ln w="12700">
-            <a:solidFill>
-              <a:srgbClr val="EAEAE8"/>
-            </a:solidFill>
-          </a:ln>
-          <a:effectLst/>
-        </p:spPr>
-        <p:style>
-          <a:lnRef idx="1">
-            <a:schemeClr val="accent1"/>
-          </a:lnRef>
-          <a:fillRef idx="3">
-            <a:schemeClr val="accent1"/>
-          </a:fillRef>
-          <a:effectRef idx="2">
-            <a:schemeClr val="accent1"/>
-          </a:effectRef>
-          <a:fontRef idx="minor">
-            <a:schemeClr val="lt1"/>
-          </a:fontRef>
-        </p:style>
-        <p:txBody>
-          <a:bodyPr rtlCol="0" anchor="ctr"/>
-          <a:lstStyle/>
-          <a:p/>
-        </p:txBody>
-      </p:sp>
-      <p:sp>
-        <p:nvSpPr>
-          <p:cNvPr id="17" name="Rounded Rectangle 16"/>
-          <p:cNvSpPr/>
-          <p:nvPr/>
-        </p:nvSpPr>
-        <p:spPr>
-          <a:xfrm>
-            <a:off x="841247" y="3834638"/>
-            <a:ext cx="365760" cy="365760"/>
-          </a:xfrm>
-          <a:prstGeom prst="roundRect">
-            <a:avLst>
-              <a:gd name="adj" fmla="val 32500"/>
-            </a:avLst>
-          </a:prstGeom>
-          <a:solidFill>
-            <a:srgbClr val="E7F0F6"/>
-          </a:solidFill>
-          <a:ln>
-            <a:noFill/>
-          </a:ln>
-          <a:effectLst/>
-        </p:spPr>
-        <p:style>
-          <a:lnRef idx="1">
-            <a:schemeClr val="accent1"/>
-          </a:lnRef>
-          <a:fillRef idx="3">
-            <a:schemeClr val="accent1"/>
-          </a:fillRef>
-          <a:effectRef idx="2">
-            <a:schemeClr val="accent1"/>
-          </a:effectRef>
-          <a:fontRef idx="minor">
-            <a:schemeClr val="lt1"/>
-          </a:fontRef>
-        </p:style>
-        <p:txBody>
-          <a:bodyPr rtlCol="0" anchor="ctr"/>
-          <a:lstStyle/>
-          <a:p/>
-        </p:txBody>
-      </p:sp>
-      <p:sp>
-        <p:nvSpPr>
-          <p:cNvPr id="18" name="TextBox 17"/>
-          <p:cNvSpPr txBox="1"/>
-          <p:nvPr/>
-        </p:nvSpPr>
-        <p:spPr>
-          <a:xfrm>
-            <a:off x="841247" y="3898646"/>
-            <a:ext cx="365760" cy="256032"/>
-          </a:xfrm>
-          <a:prstGeom prst="rect">
-            <a:avLst/>
-          </a:prstGeom>
-          <a:noFill/>
-        </p:spPr>
-        <p:txBody>
-          <a:bodyPr wrap="square" lIns="0" rIns="0" tIns="0" bIns="0" anchor="t">
-            <a:spAutoFit/>
-          </a:bodyPr>
-          <a:lstStyle/>
-          <a:p>
-            <a:pPr algn="ctr">
-              <a:lnSpc>
-                <a:spcPct val="135000"/>
-              </a:lnSpc>
-            </a:pPr>
-            <a:r>
-              <a:rPr sz="1500" b="1" i="0">
-                <a:solidFill>
-                  <a:srgbClr val="1D6B8F"/>
-                </a:solidFill>
-                <a:latin typeface="Verdana"/>
-              </a:rPr>
-              <a:t>3</a:t>
-            </a:r>
-          </a:p>
-        </p:txBody>
-      </p:sp>
-      <p:sp>
-        <p:nvSpPr>
-          <p:cNvPr id="19" name="TextBox 18"/>
-          <p:cNvSpPr txBox="1"/>
-          <p:nvPr/>
-        </p:nvSpPr>
-        <p:spPr>
-          <a:xfrm>
-            <a:off x="1344168" y="3848608"/>
-            <a:ext cx="10097719" cy="374396"/>
-          </a:xfrm>
-          <a:prstGeom prst="rect">
-            <a:avLst/>
-          </a:prstGeom>
-          <a:noFill/>
-        </p:spPr>
-        <p:txBody>
-          <a:bodyPr wrap="square" lIns="0" rIns="0" tIns="0" bIns="0" anchor="t">
-            <a:spAutoFit/>
-          </a:bodyPr>
-          <a:lstStyle/>
-          <a:p>
-            <a:pPr algn="l">
-              <a:lnSpc>
-                <a:spcPct val="140000"/>
-              </a:lnSpc>
-            </a:pPr>
-            <a:r>
-              <a:rPr sz="1900" b="0" i="0">
-                <a:solidFill>
-                  <a:srgbClr val="3A3D40"/>
-                </a:solidFill>
-                <a:latin typeface="Verdana"/>
-              </a:rPr>
-              <a:t>Combien de temps ?</a:t>
-            </a:r>
-          </a:p>
-        </p:txBody>
-      </p:sp>
-      <p:sp>
-        <p:nvSpPr>
-          <p:cNvPr id="20" name="Rounded Rectangle 19"/>
-          <p:cNvSpPr/>
-          <p:nvPr/>
-        </p:nvSpPr>
-        <p:spPr>
-          <a:xfrm>
-            <a:off x="566928" y="4469892"/>
-            <a:ext cx="11057839" cy="648716"/>
-          </a:xfrm>
-          <a:prstGeom prst="roundRect">
-            <a:avLst>
-              <a:gd name="adj" fmla="val 22552"/>
-            </a:avLst>
-          </a:prstGeom>
-          <a:solidFill>
-            <a:srgbClr val="FFFFFF"/>
-          </a:solidFill>
-          <a:ln w="12700">
-            <a:solidFill>
-              <a:srgbClr val="EAEAE8"/>
-            </a:solidFill>
-          </a:ln>
-          <a:effectLst/>
-        </p:spPr>
-        <p:style>
-          <a:lnRef idx="1">
-            <a:schemeClr val="accent1"/>
-          </a:lnRef>
-          <a:fillRef idx="3">
-            <a:schemeClr val="accent1"/>
-          </a:fillRef>
-          <a:effectRef idx="2">
-            <a:schemeClr val="accent1"/>
-          </a:effectRef>
-          <a:fontRef idx="minor">
-            <a:schemeClr val="lt1"/>
-          </a:fontRef>
-        </p:style>
-        <p:txBody>
-          <a:bodyPr rtlCol="0" anchor="ctr"/>
-          <a:lstStyle/>
-          <a:p/>
-        </p:txBody>
-      </p:sp>
-      <p:sp>
-        <p:nvSpPr>
-          <p:cNvPr id="21" name="Rounded Rectangle 20"/>
-          <p:cNvSpPr/>
-          <p:nvPr/>
-        </p:nvSpPr>
-        <p:spPr>
-          <a:xfrm>
-            <a:off x="841247" y="4611370"/>
-            <a:ext cx="365760" cy="365760"/>
-          </a:xfrm>
-          <a:prstGeom prst="roundRect">
-            <a:avLst>
-              <a:gd name="adj" fmla="val 32500"/>
-            </a:avLst>
-          </a:prstGeom>
-          <a:solidFill>
-            <a:srgbClr val="E7F0F6"/>
-          </a:solidFill>
-          <a:ln>
-            <a:noFill/>
-          </a:ln>
-          <a:effectLst/>
-        </p:spPr>
-        <p:style>
-          <a:lnRef idx="1">
-            <a:schemeClr val="accent1"/>
-          </a:lnRef>
-          <a:fillRef idx="3">
-            <a:schemeClr val="accent1"/>
-          </a:fillRef>
-          <a:effectRef idx="2">
-            <a:schemeClr val="accent1"/>
-          </a:effectRef>
-          <a:fontRef idx="minor">
-            <a:schemeClr val="lt1"/>
-          </a:fontRef>
-        </p:style>
-        <p:txBody>
-          <a:bodyPr rtlCol="0" anchor="ctr"/>
-          <a:lstStyle/>
-          <a:p/>
-        </p:txBody>
-      </p:sp>
-      <p:sp>
-        <p:nvSpPr>
-          <p:cNvPr id="22" name="TextBox 21"/>
-          <p:cNvSpPr txBox="1"/>
-          <p:nvPr/>
-        </p:nvSpPr>
-        <p:spPr>
-          <a:xfrm>
-            <a:off x="841247" y="4675378"/>
-            <a:ext cx="365760" cy="256032"/>
-          </a:xfrm>
-          <a:prstGeom prst="rect">
-            <a:avLst/>
-          </a:prstGeom>
-          <a:noFill/>
-        </p:spPr>
-        <p:txBody>
-          <a:bodyPr wrap="square" lIns="0" rIns="0" tIns="0" bIns="0" anchor="t">
-            <a:spAutoFit/>
-          </a:bodyPr>
-          <a:lstStyle/>
-          <a:p>
-            <a:pPr algn="ctr">
-              <a:lnSpc>
-                <a:spcPct val="135000"/>
-              </a:lnSpc>
-            </a:pPr>
-            <a:r>
-              <a:rPr sz="1500" b="1" i="0">
-                <a:solidFill>
-                  <a:srgbClr val="1D6B8F"/>
-                </a:solidFill>
-                <a:latin typeface="Verdana"/>
-              </a:rPr>
-              <a:t>4</a:t>
-            </a:r>
-          </a:p>
-        </p:txBody>
-      </p:sp>
-      <p:sp>
-        <p:nvSpPr>
-          <p:cNvPr id="23" name="TextBox 22"/>
-          <p:cNvSpPr txBox="1"/>
-          <p:nvPr/>
-        </p:nvSpPr>
-        <p:spPr>
-          <a:xfrm>
-            <a:off x="1344168" y="4625340"/>
-            <a:ext cx="10097719" cy="374396"/>
-          </a:xfrm>
-          <a:prstGeom prst="rect">
-            <a:avLst/>
-          </a:prstGeom>
-          <a:noFill/>
-        </p:spPr>
-        <p:txBody>
-          <a:bodyPr wrap="square" lIns="0" rIns="0" tIns="0" bIns="0" anchor="t">
-            <a:spAutoFit/>
-          </a:bodyPr>
-          <a:lstStyle/>
-          <a:p>
-            <a:pPr algn="l">
-              <a:lnSpc>
-                <a:spcPct val="140000"/>
-              </a:lnSpc>
-            </a:pPr>
-            <a:r>
-              <a:rPr sz="1900" b="0" i="0">
-                <a:solidFill>
-                  <a:srgbClr val="3A3D40"/>
-                </a:solidFill>
-                <a:latin typeface="Verdana"/>
-              </a:rPr>
-              <a:t>Quoi éviter ?</a:t>
+              <a:rPr sz="2000" b="0" i="0">
+                <a:solidFill>
+                  <a:srgbClr val="4B4F52"/>
+                </a:solidFill>
+                <a:latin typeface="Verdana"/>
+              </a:rPr>
+              <a:t>Se sentir mieux au troisième jour est normal et attendu. L'infection n'est pas finie pour autant : c'est la raison même pour laquelle le pharmacien dit « pendant sept jours » plutôt que « jusqu'à ce que ça aille mieux ».</a:t>
             </a:r>
           </a:p>
         </p:txBody>
@@ -7836,6 +7943,933 @@
       </p:sp>
       <p:sp>
         <p:nvSpPr>
+          <p:cNvPr id="5" name="TextBox 4"/>
+          <p:cNvSpPr txBox="1"/>
+          <p:nvPr/>
+        </p:nvSpPr>
+        <p:spPr>
+          <a:xfrm>
+            <a:off x="566928" y="420624"/>
+            <a:ext cx="11057839" cy="237744"/>
+          </a:xfrm>
+          <a:prstGeom prst="rect">
+            <a:avLst/>
+          </a:prstGeom>
+          <a:noFill/>
+        </p:spPr>
+        <p:txBody>
+          <a:bodyPr wrap="square" lIns="0" rIns="0" tIns="0" bIns="0" anchor="t">
+            <a:spAutoFit/>
+          </a:bodyPr>
+          <a:lstStyle/>
+          <a:p>
+            <a:pPr algn="l">
+              <a:lnSpc>
+                <a:spcPct val="135000"/>
+              </a:lnSpc>
+            </a:pPr>
+            <a:r>
+              <a:rPr sz="1300" b="1" i="0" spc="156">
+                <a:solidFill>
+                  <a:srgbClr val="1D6B8F"/>
+                </a:solidFill>
+                <a:latin typeface="Verdana"/>
+              </a:rPr>
+              <a:t>PRATIQUE · 4 DE 4</a:t>
+            </a:r>
+          </a:p>
+        </p:txBody>
+      </p:sp>
+      <p:sp>
+        <p:nvSpPr>
+          <p:cNvPr id="6" name="TextBox 5"/>
+          <p:cNvSpPr txBox="1"/>
+          <p:nvPr/>
+        </p:nvSpPr>
+        <p:spPr>
+          <a:xfrm>
+            <a:off x="566928" y="749808"/>
+            <a:ext cx="11057839" cy="877824"/>
+          </a:xfrm>
+          <a:prstGeom prst="rect">
+            <a:avLst/>
+          </a:prstGeom>
+          <a:noFill/>
+        </p:spPr>
+        <p:txBody>
+          <a:bodyPr wrap="square" lIns="0" rIns="0" tIns="0" bIns="0" anchor="t">
+            <a:spAutoFit/>
+          </a:bodyPr>
+          <a:lstStyle/>
+          <a:p>
+            <a:pPr algn="l">
+              <a:lnSpc>
+                <a:spcPct val="115000"/>
+              </a:lnSpc>
+            </a:pPr>
+            <a:r>
+              <a:rPr sz="3400" b="1" i="0">
+                <a:solidFill>
+                  <a:srgbClr val="17181A"/>
+                </a:solidFill>
+                <a:latin typeface="Verdana"/>
+              </a:rPr>
+              <a:t>Votre propre étiquette</a:t>
+            </a:r>
+          </a:p>
+        </p:txBody>
+      </p:sp>
+      <p:sp>
+        <p:nvSpPr>
+          <p:cNvPr id="7" name="TextBox 6"/>
+          <p:cNvSpPr txBox="1"/>
+          <p:nvPr/>
+        </p:nvSpPr>
+        <p:spPr>
+          <a:xfrm>
+            <a:off x="566928" y="1645920"/>
+            <a:ext cx="11057839" cy="329184"/>
+          </a:xfrm>
+          <a:prstGeom prst="rect">
+            <a:avLst/>
+          </a:prstGeom>
+          <a:noFill/>
+        </p:spPr>
+        <p:txBody>
+          <a:bodyPr wrap="square" lIns="0" rIns="0" tIns="0" bIns="0" anchor="t">
+            <a:spAutoFit/>
+          </a:bodyPr>
+          <a:lstStyle/>
+          <a:p>
+            <a:pPr algn="l">
+              <a:lnSpc>
+                <a:spcPct val="135000"/>
+              </a:lnSpc>
+            </a:pPr>
+            <a:r>
+              <a:rPr sz="1800" b="0" i="0">
+                <a:solidFill>
+                  <a:srgbClr val="6E7175"/>
+                </a:solidFill>
+                <a:latin typeface="Verdana"/>
+              </a:rPr>
+              <a:t>Prenez une boîte que vous avez chez vous, ou celle du groupe.</a:t>
+            </a:r>
+          </a:p>
+        </p:txBody>
+      </p:sp>
+      <p:sp>
+        <p:nvSpPr>
+          <p:cNvPr id="8" name="Rounded Rectangle 7"/>
+          <p:cNvSpPr/>
+          <p:nvPr/>
+        </p:nvSpPr>
+        <p:spPr>
+          <a:xfrm>
+            <a:off x="566928" y="2139696"/>
+            <a:ext cx="11057839" cy="648716"/>
+          </a:xfrm>
+          <a:prstGeom prst="roundRect">
+            <a:avLst>
+              <a:gd name="adj" fmla="val 22552"/>
+            </a:avLst>
+          </a:prstGeom>
+          <a:solidFill>
+            <a:srgbClr val="FFFFFF"/>
+          </a:solidFill>
+          <a:ln w="12700">
+            <a:solidFill>
+              <a:srgbClr val="EAEAE8"/>
+            </a:solidFill>
+          </a:ln>
+          <a:effectLst/>
+        </p:spPr>
+        <p:style>
+          <a:lnRef idx="1">
+            <a:schemeClr val="accent1"/>
+          </a:lnRef>
+          <a:fillRef idx="3">
+            <a:schemeClr val="accent1"/>
+          </a:fillRef>
+          <a:effectRef idx="2">
+            <a:schemeClr val="accent1"/>
+          </a:effectRef>
+          <a:fontRef idx="minor">
+            <a:schemeClr val="lt1"/>
+          </a:fontRef>
+        </p:style>
+        <p:txBody>
+          <a:bodyPr rtlCol="0" anchor="ctr"/>
+          <a:lstStyle/>
+          <a:p/>
+        </p:txBody>
+      </p:sp>
+      <p:sp>
+        <p:nvSpPr>
+          <p:cNvPr id="9" name="Rounded Rectangle 8"/>
+          <p:cNvSpPr/>
+          <p:nvPr/>
+        </p:nvSpPr>
+        <p:spPr>
+          <a:xfrm>
+            <a:off x="841247" y="2281174"/>
+            <a:ext cx="365760" cy="365760"/>
+          </a:xfrm>
+          <a:prstGeom prst="roundRect">
+            <a:avLst>
+              <a:gd name="adj" fmla="val 32500"/>
+            </a:avLst>
+          </a:prstGeom>
+          <a:solidFill>
+            <a:srgbClr val="E7F0F6"/>
+          </a:solidFill>
+          <a:ln>
+            <a:noFill/>
+          </a:ln>
+          <a:effectLst/>
+        </p:spPr>
+        <p:style>
+          <a:lnRef idx="1">
+            <a:schemeClr val="accent1"/>
+          </a:lnRef>
+          <a:fillRef idx="3">
+            <a:schemeClr val="accent1"/>
+          </a:fillRef>
+          <a:effectRef idx="2">
+            <a:schemeClr val="accent1"/>
+          </a:effectRef>
+          <a:fontRef idx="minor">
+            <a:schemeClr val="lt1"/>
+          </a:fontRef>
+        </p:style>
+        <p:txBody>
+          <a:bodyPr rtlCol="0" anchor="ctr"/>
+          <a:lstStyle/>
+          <a:p/>
+        </p:txBody>
+      </p:sp>
+      <p:sp>
+        <p:nvSpPr>
+          <p:cNvPr id="10" name="TextBox 9"/>
+          <p:cNvSpPr txBox="1"/>
+          <p:nvPr/>
+        </p:nvSpPr>
+        <p:spPr>
+          <a:xfrm>
+            <a:off x="841247" y="2345182"/>
+            <a:ext cx="365760" cy="256032"/>
+          </a:xfrm>
+          <a:prstGeom prst="rect">
+            <a:avLst/>
+          </a:prstGeom>
+          <a:noFill/>
+        </p:spPr>
+        <p:txBody>
+          <a:bodyPr wrap="square" lIns="0" rIns="0" tIns="0" bIns="0" anchor="t">
+            <a:spAutoFit/>
+          </a:bodyPr>
+          <a:lstStyle/>
+          <a:p>
+            <a:pPr algn="ctr">
+              <a:lnSpc>
+                <a:spcPct val="135000"/>
+              </a:lnSpc>
+            </a:pPr>
+            <a:r>
+              <a:rPr sz="1500" b="1" i="0">
+                <a:solidFill>
+                  <a:srgbClr val="1D6B8F"/>
+                </a:solidFill>
+                <a:latin typeface="Verdana"/>
+              </a:rPr>
+              <a:t>1</a:t>
+            </a:r>
+          </a:p>
+        </p:txBody>
+      </p:sp>
+      <p:sp>
+        <p:nvSpPr>
+          <p:cNvPr id="11" name="TextBox 10"/>
+          <p:cNvSpPr txBox="1"/>
+          <p:nvPr/>
+        </p:nvSpPr>
+        <p:spPr>
+          <a:xfrm>
+            <a:off x="1344168" y="2295144"/>
+            <a:ext cx="10097719" cy="374396"/>
+          </a:xfrm>
+          <a:prstGeom prst="rect">
+            <a:avLst/>
+          </a:prstGeom>
+          <a:noFill/>
+        </p:spPr>
+        <p:txBody>
+          <a:bodyPr wrap="square" lIns="0" rIns="0" tIns="0" bIns="0" anchor="t">
+            <a:spAutoFit/>
+          </a:bodyPr>
+          <a:lstStyle/>
+          <a:p>
+            <a:pPr algn="l">
+              <a:lnSpc>
+                <a:spcPct val="140000"/>
+              </a:lnSpc>
+            </a:pPr>
+            <a:r>
+              <a:rPr sz="1900" b="0" i="0">
+                <a:solidFill>
+                  <a:srgbClr val="3A3D40"/>
+                </a:solidFill>
+                <a:latin typeface="Verdana"/>
+              </a:rPr>
+              <a:t>Combien ?</a:t>
+            </a:r>
+          </a:p>
+        </p:txBody>
+      </p:sp>
+      <p:sp>
+        <p:nvSpPr>
+          <p:cNvPr id="12" name="Rounded Rectangle 11"/>
+          <p:cNvSpPr/>
+          <p:nvPr/>
+        </p:nvSpPr>
+        <p:spPr>
+          <a:xfrm>
+            <a:off x="566928" y="2916428"/>
+            <a:ext cx="11057839" cy="648716"/>
+          </a:xfrm>
+          <a:prstGeom prst="roundRect">
+            <a:avLst>
+              <a:gd name="adj" fmla="val 22552"/>
+            </a:avLst>
+          </a:prstGeom>
+          <a:solidFill>
+            <a:srgbClr val="FFFFFF"/>
+          </a:solidFill>
+          <a:ln w="12700">
+            <a:solidFill>
+              <a:srgbClr val="EAEAE8"/>
+            </a:solidFill>
+          </a:ln>
+          <a:effectLst/>
+        </p:spPr>
+        <p:style>
+          <a:lnRef idx="1">
+            <a:schemeClr val="accent1"/>
+          </a:lnRef>
+          <a:fillRef idx="3">
+            <a:schemeClr val="accent1"/>
+          </a:fillRef>
+          <a:effectRef idx="2">
+            <a:schemeClr val="accent1"/>
+          </a:effectRef>
+          <a:fontRef idx="minor">
+            <a:schemeClr val="lt1"/>
+          </a:fontRef>
+        </p:style>
+        <p:txBody>
+          <a:bodyPr rtlCol="0" anchor="ctr"/>
+          <a:lstStyle/>
+          <a:p/>
+        </p:txBody>
+      </p:sp>
+      <p:sp>
+        <p:nvSpPr>
+          <p:cNvPr id="13" name="Rounded Rectangle 12"/>
+          <p:cNvSpPr/>
+          <p:nvPr/>
+        </p:nvSpPr>
+        <p:spPr>
+          <a:xfrm>
+            <a:off x="841247" y="3057905"/>
+            <a:ext cx="365760" cy="365760"/>
+          </a:xfrm>
+          <a:prstGeom prst="roundRect">
+            <a:avLst>
+              <a:gd name="adj" fmla="val 32500"/>
+            </a:avLst>
+          </a:prstGeom>
+          <a:solidFill>
+            <a:srgbClr val="E7F0F6"/>
+          </a:solidFill>
+          <a:ln>
+            <a:noFill/>
+          </a:ln>
+          <a:effectLst/>
+        </p:spPr>
+        <p:style>
+          <a:lnRef idx="1">
+            <a:schemeClr val="accent1"/>
+          </a:lnRef>
+          <a:fillRef idx="3">
+            <a:schemeClr val="accent1"/>
+          </a:fillRef>
+          <a:effectRef idx="2">
+            <a:schemeClr val="accent1"/>
+          </a:effectRef>
+          <a:fontRef idx="minor">
+            <a:schemeClr val="lt1"/>
+          </a:fontRef>
+        </p:style>
+        <p:txBody>
+          <a:bodyPr rtlCol="0" anchor="ctr"/>
+          <a:lstStyle/>
+          <a:p/>
+        </p:txBody>
+      </p:sp>
+      <p:sp>
+        <p:nvSpPr>
+          <p:cNvPr id="14" name="TextBox 13"/>
+          <p:cNvSpPr txBox="1"/>
+          <p:nvPr/>
+        </p:nvSpPr>
+        <p:spPr>
+          <a:xfrm>
+            <a:off x="841247" y="3121913"/>
+            <a:ext cx="365760" cy="256032"/>
+          </a:xfrm>
+          <a:prstGeom prst="rect">
+            <a:avLst/>
+          </a:prstGeom>
+          <a:noFill/>
+        </p:spPr>
+        <p:txBody>
+          <a:bodyPr wrap="square" lIns="0" rIns="0" tIns="0" bIns="0" anchor="t">
+            <a:spAutoFit/>
+          </a:bodyPr>
+          <a:lstStyle/>
+          <a:p>
+            <a:pPr algn="ctr">
+              <a:lnSpc>
+                <a:spcPct val="135000"/>
+              </a:lnSpc>
+            </a:pPr>
+            <a:r>
+              <a:rPr sz="1500" b="1" i="0">
+                <a:solidFill>
+                  <a:srgbClr val="1D6B8F"/>
+                </a:solidFill>
+                <a:latin typeface="Verdana"/>
+              </a:rPr>
+              <a:t>2</a:t>
+            </a:r>
+          </a:p>
+        </p:txBody>
+      </p:sp>
+      <p:sp>
+        <p:nvSpPr>
+          <p:cNvPr id="15" name="TextBox 14"/>
+          <p:cNvSpPr txBox="1"/>
+          <p:nvPr/>
+        </p:nvSpPr>
+        <p:spPr>
+          <a:xfrm>
+            <a:off x="1344168" y="3071876"/>
+            <a:ext cx="10097719" cy="374396"/>
+          </a:xfrm>
+          <a:prstGeom prst="rect">
+            <a:avLst/>
+          </a:prstGeom>
+          <a:noFill/>
+        </p:spPr>
+        <p:txBody>
+          <a:bodyPr wrap="square" lIns="0" rIns="0" tIns="0" bIns="0" anchor="t">
+            <a:spAutoFit/>
+          </a:bodyPr>
+          <a:lstStyle/>
+          <a:p>
+            <a:pPr algn="l">
+              <a:lnSpc>
+                <a:spcPct val="140000"/>
+              </a:lnSpc>
+            </a:pPr>
+            <a:r>
+              <a:rPr sz="1900" b="0" i="0">
+                <a:solidFill>
+                  <a:srgbClr val="3A3D40"/>
+                </a:solidFill>
+                <a:latin typeface="Verdana"/>
+              </a:rPr>
+              <a:t>Quand ?</a:t>
+            </a:r>
+          </a:p>
+        </p:txBody>
+      </p:sp>
+      <p:sp>
+        <p:nvSpPr>
+          <p:cNvPr id="16" name="Rounded Rectangle 15"/>
+          <p:cNvSpPr/>
+          <p:nvPr/>
+        </p:nvSpPr>
+        <p:spPr>
+          <a:xfrm>
+            <a:off x="566928" y="3693160"/>
+            <a:ext cx="11057839" cy="648716"/>
+          </a:xfrm>
+          <a:prstGeom prst="roundRect">
+            <a:avLst>
+              <a:gd name="adj" fmla="val 22552"/>
+            </a:avLst>
+          </a:prstGeom>
+          <a:solidFill>
+            <a:srgbClr val="FFFFFF"/>
+          </a:solidFill>
+          <a:ln w="12700">
+            <a:solidFill>
+              <a:srgbClr val="EAEAE8"/>
+            </a:solidFill>
+          </a:ln>
+          <a:effectLst/>
+        </p:spPr>
+        <p:style>
+          <a:lnRef idx="1">
+            <a:schemeClr val="accent1"/>
+          </a:lnRef>
+          <a:fillRef idx="3">
+            <a:schemeClr val="accent1"/>
+          </a:fillRef>
+          <a:effectRef idx="2">
+            <a:schemeClr val="accent1"/>
+          </a:effectRef>
+          <a:fontRef idx="minor">
+            <a:schemeClr val="lt1"/>
+          </a:fontRef>
+        </p:style>
+        <p:txBody>
+          <a:bodyPr rtlCol="0" anchor="ctr"/>
+          <a:lstStyle/>
+          <a:p/>
+        </p:txBody>
+      </p:sp>
+      <p:sp>
+        <p:nvSpPr>
+          <p:cNvPr id="17" name="Rounded Rectangle 16"/>
+          <p:cNvSpPr/>
+          <p:nvPr/>
+        </p:nvSpPr>
+        <p:spPr>
+          <a:xfrm>
+            <a:off x="841247" y="3834638"/>
+            <a:ext cx="365760" cy="365760"/>
+          </a:xfrm>
+          <a:prstGeom prst="roundRect">
+            <a:avLst>
+              <a:gd name="adj" fmla="val 32500"/>
+            </a:avLst>
+          </a:prstGeom>
+          <a:solidFill>
+            <a:srgbClr val="E7F0F6"/>
+          </a:solidFill>
+          <a:ln>
+            <a:noFill/>
+          </a:ln>
+          <a:effectLst/>
+        </p:spPr>
+        <p:style>
+          <a:lnRef idx="1">
+            <a:schemeClr val="accent1"/>
+          </a:lnRef>
+          <a:fillRef idx="3">
+            <a:schemeClr val="accent1"/>
+          </a:fillRef>
+          <a:effectRef idx="2">
+            <a:schemeClr val="accent1"/>
+          </a:effectRef>
+          <a:fontRef idx="minor">
+            <a:schemeClr val="lt1"/>
+          </a:fontRef>
+        </p:style>
+        <p:txBody>
+          <a:bodyPr rtlCol="0" anchor="ctr"/>
+          <a:lstStyle/>
+          <a:p/>
+        </p:txBody>
+      </p:sp>
+      <p:sp>
+        <p:nvSpPr>
+          <p:cNvPr id="18" name="TextBox 17"/>
+          <p:cNvSpPr txBox="1"/>
+          <p:nvPr/>
+        </p:nvSpPr>
+        <p:spPr>
+          <a:xfrm>
+            <a:off x="841247" y="3898646"/>
+            <a:ext cx="365760" cy="256032"/>
+          </a:xfrm>
+          <a:prstGeom prst="rect">
+            <a:avLst/>
+          </a:prstGeom>
+          <a:noFill/>
+        </p:spPr>
+        <p:txBody>
+          <a:bodyPr wrap="square" lIns="0" rIns="0" tIns="0" bIns="0" anchor="t">
+            <a:spAutoFit/>
+          </a:bodyPr>
+          <a:lstStyle/>
+          <a:p>
+            <a:pPr algn="ctr">
+              <a:lnSpc>
+                <a:spcPct val="135000"/>
+              </a:lnSpc>
+            </a:pPr>
+            <a:r>
+              <a:rPr sz="1500" b="1" i="0">
+                <a:solidFill>
+                  <a:srgbClr val="1D6B8F"/>
+                </a:solidFill>
+                <a:latin typeface="Verdana"/>
+              </a:rPr>
+              <a:t>3</a:t>
+            </a:r>
+          </a:p>
+        </p:txBody>
+      </p:sp>
+      <p:sp>
+        <p:nvSpPr>
+          <p:cNvPr id="19" name="TextBox 18"/>
+          <p:cNvSpPr txBox="1"/>
+          <p:nvPr/>
+        </p:nvSpPr>
+        <p:spPr>
+          <a:xfrm>
+            <a:off x="1344168" y="3848608"/>
+            <a:ext cx="10097719" cy="374396"/>
+          </a:xfrm>
+          <a:prstGeom prst="rect">
+            <a:avLst/>
+          </a:prstGeom>
+          <a:noFill/>
+        </p:spPr>
+        <p:txBody>
+          <a:bodyPr wrap="square" lIns="0" rIns="0" tIns="0" bIns="0" anchor="t">
+            <a:spAutoFit/>
+          </a:bodyPr>
+          <a:lstStyle/>
+          <a:p>
+            <a:pPr algn="l">
+              <a:lnSpc>
+                <a:spcPct val="140000"/>
+              </a:lnSpc>
+            </a:pPr>
+            <a:r>
+              <a:rPr sz="1900" b="0" i="0">
+                <a:solidFill>
+                  <a:srgbClr val="3A3D40"/>
+                </a:solidFill>
+                <a:latin typeface="Verdana"/>
+              </a:rPr>
+              <a:t>Combien de temps ?</a:t>
+            </a:r>
+          </a:p>
+        </p:txBody>
+      </p:sp>
+      <p:sp>
+        <p:nvSpPr>
+          <p:cNvPr id="20" name="Rounded Rectangle 19"/>
+          <p:cNvSpPr/>
+          <p:nvPr/>
+        </p:nvSpPr>
+        <p:spPr>
+          <a:xfrm>
+            <a:off x="566928" y="4469892"/>
+            <a:ext cx="11057839" cy="648716"/>
+          </a:xfrm>
+          <a:prstGeom prst="roundRect">
+            <a:avLst>
+              <a:gd name="adj" fmla="val 22552"/>
+            </a:avLst>
+          </a:prstGeom>
+          <a:solidFill>
+            <a:srgbClr val="FFFFFF"/>
+          </a:solidFill>
+          <a:ln w="12700">
+            <a:solidFill>
+              <a:srgbClr val="EAEAE8"/>
+            </a:solidFill>
+          </a:ln>
+          <a:effectLst/>
+        </p:spPr>
+        <p:style>
+          <a:lnRef idx="1">
+            <a:schemeClr val="accent1"/>
+          </a:lnRef>
+          <a:fillRef idx="3">
+            <a:schemeClr val="accent1"/>
+          </a:fillRef>
+          <a:effectRef idx="2">
+            <a:schemeClr val="accent1"/>
+          </a:effectRef>
+          <a:fontRef idx="minor">
+            <a:schemeClr val="lt1"/>
+          </a:fontRef>
+        </p:style>
+        <p:txBody>
+          <a:bodyPr rtlCol="0" anchor="ctr"/>
+          <a:lstStyle/>
+          <a:p/>
+        </p:txBody>
+      </p:sp>
+      <p:sp>
+        <p:nvSpPr>
+          <p:cNvPr id="21" name="Rounded Rectangle 20"/>
+          <p:cNvSpPr/>
+          <p:nvPr/>
+        </p:nvSpPr>
+        <p:spPr>
+          <a:xfrm>
+            <a:off x="841247" y="4611370"/>
+            <a:ext cx="365760" cy="365760"/>
+          </a:xfrm>
+          <a:prstGeom prst="roundRect">
+            <a:avLst>
+              <a:gd name="adj" fmla="val 32500"/>
+            </a:avLst>
+          </a:prstGeom>
+          <a:solidFill>
+            <a:srgbClr val="E7F0F6"/>
+          </a:solidFill>
+          <a:ln>
+            <a:noFill/>
+          </a:ln>
+          <a:effectLst/>
+        </p:spPr>
+        <p:style>
+          <a:lnRef idx="1">
+            <a:schemeClr val="accent1"/>
+          </a:lnRef>
+          <a:fillRef idx="3">
+            <a:schemeClr val="accent1"/>
+          </a:fillRef>
+          <a:effectRef idx="2">
+            <a:schemeClr val="accent1"/>
+          </a:effectRef>
+          <a:fontRef idx="minor">
+            <a:schemeClr val="lt1"/>
+          </a:fontRef>
+        </p:style>
+        <p:txBody>
+          <a:bodyPr rtlCol="0" anchor="ctr"/>
+          <a:lstStyle/>
+          <a:p/>
+        </p:txBody>
+      </p:sp>
+      <p:sp>
+        <p:nvSpPr>
+          <p:cNvPr id="22" name="TextBox 21"/>
+          <p:cNvSpPr txBox="1"/>
+          <p:nvPr/>
+        </p:nvSpPr>
+        <p:spPr>
+          <a:xfrm>
+            <a:off x="841247" y="4675378"/>
+            <a:ext cx="365760" cy="256032"/>
+          </a:xfrm>
+          <a:prstGeom prst="rect">
+            <a:avLst/>
+          </a:prstGeom>
+          <a:noFill/>
+        </p:spPr>
+        <p:txBody>
+          <a:bodyPr wrap="square" lIns="0" rIns="0" tIns="0" bIns="0" anchor="t">
+            <a:spAutoFit/>
+          </a:bodyPr>
+          <a:lstStyle/>
+          <a:p>
+            <a:pPr algn="ctr">
+              <a:lnSpc>
+                <a:spcPct val="135000"/>
+              </a:lnSpc>
+            </a:pPr>
+            <a:r>
+              <a:rPr sz="1500" b="1" i="0">
+                <a:solidFill>
+                  <a:srgbClr val="1D6B8F"/>
+                </a:solidFill>
+                <a:latin typeface="Verdana"/>
+              </a:rPr>
+              <a:t>4</a:t>
+            </a:r>
+          </a:p>
+        </p:txBody>
+      </p:sp>
+      <p:sp>
+        <p:nvSpPr>
+          <p:cNvPr id="23" name="TextBox 22"/>
+          <p:cNvSpPr txBox="1"/>
+          <p:nvPr/>
+        </p:nvSpPr>
+        <p:spPr>
+          <a:xfrm>
+            <a:off x="1344168" y="4625340"/>
+            <a:ext cx="10097719" cy="374396"/>
+          </a:xfrm>
+          <a:prstGeom prst="rect">
+            <a:avLst/>
+          </a:prstGeom>
+          <a:noFill/>
+        </p:spPr>
+        <p:txBody>
+          <a:bodyPr wrap="square" lIns="0" rIns="0" tIns="0" bIns="0" anchor="t">
+            <a:spAutoFit/>
+          </a:bodyPr>
+          <a:lstStyle/>
+          <a:p>
+            <a:pPr algn="l">
+              <a:lnSpc>
+                <a:spcPct val="140000"/>
+              </a:lnSpc>
+            </a:pPr>
+            <a:r>
+              <a:rPr sz="1900" b="0" i="0">
+                <a:solidFill>
+                  <a:srgbClr val="3A3D40"/>
+                </a:solidFill>
+                <a:latin typeface="Verdana"/>
+              </a:rPr>
+              <a:t>Quoi éviter ?</a:t>
+            </a:r>
+          </a:p>
+        </p:txBody>
+      </p:sp>
+    </p:spTree>
+  </p:cSld>
+  <p:clrMapOvr>
+    <a:masterClrMapping/>
+  </p:clrMapOvr>
+</p:sld>
+</file>
+
+<file path=ppt/slides/slide15.xml><?xml version="1.0" encoding="utf-8"?>
+<p:sld xmlns:a="http://schemas.openxmlformats.org/drawingml/2006/main" xmlns:p="http://schemas.openxmlformats.org/presentationml/2006/main" xmlns:r="http://schemas.openxmlformats.org/officeDocument/2006/relationships">
+  <p:cSld>
+    <p:spTree>
+      <p:nvGrpSpPr>
+        <p:cNvPr id="1" name=""/>
+        <p:cNvGrpSpPr/>
+        <p:nvPr/>
+      </p:nvGrpSpPr>
+      <p:grpSpPr/>
+      <p:sp>
+        <p:nvSpPr>
+          <p:cNvPr id="2" name="Rectangle 1"/>
+          <p:cNvSpPr/>
+          <p:nvPr/>
+        </p:nvSpPr>
+        <p:spPr>
+          <a:xfrm>
+            <a:off x="0" y="0"/>
+            <a:ext cx="12191695" cy="6858000"/>
+          </a:xfrm>
+          <a:prstGeom prst="rect">
+            <a:avLst/>
+          </a:prstGeom>
+          <a:solidFill>
+            <a:srgbClr val="F7F7F5"/>
+          </a:solidFill>
+          <a:ln>
+            <a:noFill/>
+          </a:ln>
+          <a:effectLst/>
+        </p:spPr>
+        <p:style>
+          <a:lnRef idx="1">
+            <a:schemeClr val="accent1"/>
+          </a:lnRef>
+          <a:fillRef idx="3">
+            <a:schemeClr val="accent1"/>
+          </a:fillRef>
+          <a:effectRef idx="2">
+            <a:schemeClr val="accent1"/>
+          </a:effectRef>
+          <a:fontRef idx="minor">
+            <a:schemeClr val="lt1"/>
+          </a:fontRef>
+        </p:style>
+        <p:txBody>
+          <a:bodyPr rtlCol="0" anchor="ctr"/>
+          <a:lstStyle/>
+          <a:p/>
+        </p:txBody>
+      </p:sp>
+      <p:sp>
+        <p:nvSpPr>
+          <p:cNvPr id="3" name="TextBox 2"/>
+          <p:cNvSpPr txBox="1"/>
+          <p:nvPr/>
+        </p:nvSpPr>
+        <p:spPr>
+          <a:xfrm>
+            <a:off x="566928" y="6355080"/>
+            <a:ext cx="6400800" cy="219456"/>
+          </a:xfrm>
+          <a:prstGeom prst="rect">
+            <a:avLst/>
+          </a:prstGeom>
+          <a:noFill/>
+        </p:spPr>
+        <p:txBody>
+          <a:bodyPr wrap="square" lIns="0" rIns="0" tIns="0" bIns="0" anchor="t">
+            <a:spAutoFit/>
+          </a:bodyPr>
+          <a:lstStyle/>
+          <a:p>
+            <a:pPr algn="l">
+              <a:lnSpc>
+                <a:spcPct val="135000"/>
+              </a:lnSpc>
+            </a:pPr>
+            <a:r>
+              <a:rPr sz="1200" b="0" i="0">
+                <a:solidFill>
+                  <a:srgbClr val="6E7175"/>
+                </a:solidFill>
+                <a:latin typeface="Verdana"/>
+              </a:rPr>
+              <a:t>B3 · Prendre rendez-vous et aller à la pharmacie</a:t>
+            </a:r>
+          </a:p>
+        </p:txBody>
+      </p:sp>
+      <p:sp>
+        <p:nvSpPr>
+          <p:cNvPr id="4" name="TextBox 3"/>
+          <p:cNvSpPr txBox="1"/>
+          <p:nvPr/>
+        </p:nvSpPr>
+        <p:spPr>
+          <a:xfrm>
+            <a:off x="10710367" y="6355080"/>
+            <a:ext cx="914400" cy="219456"/>
+          </a:xfrm>
+          <a:prstGeom prst="rect">
+            <a:avLst/>
+          </a:prstGeom>
+          <a:noFill/>
+        </p:spPr>
+        <p:txBody>
+          <a:bodyPr wrap="square" lIns="0" rIns="0" tIns="0" bIns="0" anchor="t">
+            <a:spAutoFit/>
+          </a:bodyPr>
+          <a:lstStyle/>
+          <a:p>
+            <a:pPr algn="r">
+              <a:lnSpc>
+                <a:spcPct val="135000"/>
+              </a:lnSpc>
+            </a:pPr>
+            <a:r>
+              <a:rPr sz="1200" b="0" i="0">
+                <a:solidFill>
+                  <a:srgbClr val="6E7175"/>
+                </a:solidFill>
+                <a:latin typeface="Verdana"/>
+              </a:rPr>
+              <a:t>15</a:t>
+            </a:r>
+          </a:p>
+        </p:txBody>
+      </p:sp>
+      <p:sp>
+        <p:nvSpPr>
           <p:cNvPr id="5" name="Rectangle 4"/>
           <p:cNvSpPr/>
           <p:nvPr/>
@@ -11109,7 +12143,7 @@
                 </a:solidFill>
                 <a:latin typeface="Verdana"/>
               </a:rPr>
-              <a:t>ANALYSE</a:t>
+              <a:t>DANS L'ACTIVITÉ INTERACTIVE</a:t>
             </a:r>
           </a:p>
         </p:txBody>
@@ -11142,31 +12176,70 @@
               </a:lnSpc>
             </a:pPr>
             <a:r>
-              <a:rPr sz="2900" b="1" i="0">
+              <a:rPr sz="3400" b="1" i="0">
                 <a:solidFill>
                   <a:srgbClr val="17181A"/>
                 </a:solidFill>
                 <a:latin typeface="Verdana"/>
               </a:rPr>
-              <a:t>Quatre questions à se poser devant un médicament</a:t>
-            </a:r>
-          </a:p>
-        </p:txBody>
-      </p:sp>
-      <p:sp>
-        <p:nvSpPr>
-          <p:cNvPr id="7" name="Rounded Rectangle 6"/>
+              <a:t>Les consignes du pharmacien</a:t>
+            </a:r>
+          </a:p>
+        </p:txBody>
+      </p:sp>
+      <p:sp>
+        <p:nvSpPr>
+          <p:cNvPr id="7" name="TextBox 6"/>
+          <p:cNvSpPr txBox="1"/>
+          <p:nvPr/>
+        </p:nvSpPr>
+        <p:spPr>
+          <a:xfrm>
+            <a:off x="566928" y="1645920"/>
+            <a:ext cx="11057839" cy="329184"/>
+          </a:xfrm>
+          <a:prstGeom prst="rect">
+            <a:avLst/>
+          </a:prstGeom>
+          <a:noFill/>
+        </p:spPr>
+        <p:txBody>
+          <a:bodyPr wrap="square" lIns="0" rIns="0" tIns="0" bIns="0" anchor="t">
+            <a:spAutoFit/>
+          </a:bodyPr>
+          <a:lstStyle/>
+          <a:p>
+            <a:pPr algn="l">
+              <a:lnSpc>
+                <a:spcPct val="135000"/>
+              </a:lnSpc>
+            </a:pPr>
+            <a:r>
+              <a:rPr sz="1800" b="0" i="0">
+                <a:solidFill>
+                  <a:srgbClr val="6E7175"/>
+                </a:solidFill>
+                <a:latin typeface="Verdana"/>
+              </a:rPr>
+              <a:t>L'écran que les élèves vont ouvrir. Les réponses sont encore dans le banc, à droite.</a:t>
+            </a:r>
+          </a:p>
+        </p:txBody>
+      </p:sp>
+      <p:sp>
+        <p:nvSpPr>
+          <p:cNvPr id="8" name="Rounded Rectangle 7"/>
           <p:cNvSpPr/>
           <p:nvPr/>
         </p:nvSpPr>
         <p:spPr>
           <a:xfrm>
-            <a:off x="566928" y="1810512"/>
-            <a:ext cx="11057839" cy="2798064"/>
+            <a:off x="1512381" y="2084831"/>
+            <a:ext cx="9166932" cy="4087368"/>
           </a:xfrm>
           <a:prstGeom prst="roundRect">
             <a:avLst>
-              <a:gd name="adj" fmla="val 5228"/>
+              <a:gd name="adj" fmla="val 2237"/>
             </a:avLst>
           </a:prstGeom>
           <a:solidFill>
@@ -11174,7 +12247,7 @@
           </a:solidFill>
           <a:ln w="12700">
             <a:solidFill>
-              <a:srgbClr val="EAEAE8"/>
+              <a:srgbClr val="D6D6D2"/>
             </a:solidFill>
           </a:ln>
           <a:effectLst/>
@@ -11199,607 +12272,30 @@
           <a:p/>
         </p:txBody>
       </p:sp>
-      <p:sp>
-        <p:nvSpPr>
-          <p:cNvPr id="8" name="TextBox 7"/>
-          <p:cNvSpPr txBox="1"/>
-          <p:nvPr/>
-        </p:nvSpPr>
-        <p:spPr>
-          <a:xfrm>
-            <a:off x="932688" y="1975104"/>
-            <a:ext cx="3291492" cy="237744"/>
-          </a:xfrm>
-          <a:prstGeom prst="rect">
-            <a:avLst/>
-          </a:prstGeom>
-          <a:noFill/>
-        </p:spPr>
-        <p:txBody>
-          <a:bodyPr wrap="square" lIns="0" rIns="0" tIns="0" bIns="0" anchor="t">
-            <a:spAutoFit/>
-          </a:bodyPr>
-          <a:lstStyle/>
-          <a:p>
-            <a:pPr algn="l">
-              <a:lnSpc>
-                <a:spcPct val="135000"/>
-              </a:lnSpc>
-            </a:pPr>
-            <a:r>
-              <a:rPr sz="1300" b="1" i="0" spc="156">
-                <a:solidFill>
-                  <a:srgbClr val="6E7175"/>
-                </a:solidFill>
-                <a:latin typeface="Verdana"/>
-              </a:rPr>
-              <a:t>LA QUESTION</a:t>
-            </a:r>
-          </a:p>
-        </p:txBody>
-      </p:sp>
-      <p:sp>
-        <p:nvSpPr>
-          <p:cNvPr id="9" name="TextBox 8"/>
-          <p:cNvSpPr txBox="1"/>
-          <p:nvPr/>
-        </p:nvSpPr>
-        <p:spPr>
-          <a:xfrm>
-            <a:off x="4443636" y="1975104"/>
-            <a:ext cx="6595914" cy="237744"/>
-          </a:xfrm>
-          <a:prstGeom prst="rect">
-            <a:avLst/>
-          </a:prstGeom>
-          <a:noFill/>
-        </p:spPr>
-        <p:txBody>
-          <a:bodyPr wrap="square" lIns="0" rIns="0" tIns="0" bIns="0" anchor="t">
-            <a:spAutoFit/>
-          </a:bodyPr>
-          <a:lstStyle/>
-          <a:p>
-            <a:pPr algn="l">
-              <a:lnSpc>
-                <a:spcPct val="135000"/>
-              </a:lnSpc>
-            </a:pPr>
-            <a:r>
-              <a:rPr sz="1300" b="1" i="0" spc="156">
-                <a:solidFill>
-                  <a:srgbClr val="6E7175"/>
-                </a:solidFill>
-                <a:latin typeface="Verdana"/>
-              </a:rPr>
-              <a:t>CE QU'ON CHERCHE SUR L'ÉTIQUETTE</a:t>
-            </a:r>
-          </a:p>
-        </p:txBody>
-      </p:sp>
-      <p:sp>
-        <p:nvSpPr>
-          <p:cNvPr id="10" name="TextBox 9"/>
-          <p:cNvSpPr txBox="1"/>
-          <p:nvPr/>
-        </p:nvSpPr>
-        <p:spPr>
-          <a:xfrm>
-            <a:off x="932688" y="2395728"/>
-            <a:ext cx="3291492" cy="338328"/>
-          </a:xfrm>
-          <a:prstGeom prst="rect">
-            <a:avLst/>
-          </a:prstGeom>
-          <a:noFill/>
-        </p:spPr>
-        <p:txBody>
-          <a:bodyPr wrap="square" lIns="0" rIns="0" tIns="0" bIns="0" anchor="t">
-            <a:spAutoFit/>
-          </a:bodyPr>
-          <a:lstStyle/>
-          <a:p>
-            <a:pPr algn="l">
-              <a:lnSpc>
-                <a:spcPct val="132000"/>
-              </a:lnSpc>
-            </a:pPr>
-            <a:r>
-              <a:rPr sz="1800" b="1" i="0">
-                <a:solidFill>
-                  <a:srgbClr val="1D6B8F"/>
-                </a:solidFill>
-                <a:latin typeface="Verdana"/>
-              </a:rPr>
-              <a:t>Combien ?</a:t>
-            </a:r>
-          </a:p>
-        </p:txBody>
-      </p:sp>
-      <p:sp>
-        <p:nvSpPr>
-          <p:cNvPr id="11" name="TextBox 10"/>
-          <p:cNvSpPr txBox="1"/>
-          <p:nvPr/>
-        </p:nvSpPr>
-        <p:spPr>
-          <a:xfrm>
-            <a:off x="4443636" y="2395728"/>
-            <a:ext cx="6595914" cy="338328"/>
-          </a:xfrm>
-          <a:prstGeom prst="rect">
-            <a:avLst/>
-          </a:prstGeom>
-          <a:noFill/>
-        </p:spPr>
-        <p:txBody>
-          <a:bodyPr wrap="square" lIns="0" rIns="0" tIns="0" bIns="0" anchor="t">
-            <a:spAutoFit/>
-          </a:bodyPr>
-          <a:lstStyle/>
-          <a:p>
-            <a:pPr algn="l">
-              <a:lnSpc>
-                <a:spcPct val="132000"/>
-              </a:lnSpc>
-            </a:pPr>
-            <a:r>
-              <a:rPr sz="1800" b="0" i="0">
-                <a:solidFill>
-                  <a:srgbClr val="3A3D40"/>
-                </a:solidFill>
-                <a:latin typeface="Verdana"/>
-              </a:rPr>
-              <a:t>un comprimé, deux comprimés, une cuillère</a:t>
-            </a:r>
-          </a:p>
-        </p:txBody>
-      </p:sp>
-      <p:sp>
-        <p:nvSpPr>
-          <p:cNvPr id="12" name="Rectangle 11"/>
-          <p:cNvSpPr/>
-          <p:nvPr/>
-        </p:nvSpPr>
-        <p:spPr>
-          <a:xfrm>
-            <a:off x="932688" y="2807208"/>
-            <a:ext cx="10326319" cy="10058"/>
-          </a:xfrm>
-          <a:prstGeom prst="rect">
-            <a:avLst/>
-          </a:prstGeom>
-          <a:solidFill>
-            <a:srgbClr val="EAEAE8"/>
-          </a:solidFill>
-          <a:ln>
-            <a:noFill/>
-          </a:ln>
-          <a:effectLst/>
-        </p:spPr>
-        <p:style>
-          <a:lnRef idx="1">
-            <a:schemeClr val="accent1"/>
-          </a:lnRef>
-          <a:fillRef idx="3">
-            <a:schemeClr val="accent1"/>
-          </a:fillRef>
-          <a:effectRef idx="2">
-            <a:schemeClr val="accent1"/>
-          </a:effectRef>
-          <a:fontRef idx="minor">
-            <a:schemeClr val="lt1"/>
-          </a:fontRef>
-        </p:style>
-        <p:txBody>
-          <a:bodyPr rtlCol="0" anchor="ctr"/>
-          <a:lstStyle/>
-          <a:p/>
-        </p:txBody>
-      </p:sp>
-      <p:sp>
-        <p:nvSpPr>
-          <p:cNvPr id="13" name="TextBox 12"/>
-          <p:cNvSpPr txBox="1"/>
-          <p:nvPr/>
-        </p:nvSpPr>
-        <p:spPr>
-          <a:xfrm>
-            <a:off x="932688" y="2935224"/>
-            <a:ext cx="3291492" cy="338328"/>
-          </a:xfrm>
-          <a:prstGeom prst="rect">
-            <a:avLst/>
-          </a:prstGeom>
-          <a:noFill/>
-        </p:spPr>
-        <p:txBody>
-          <a:bodyPr wrap="square" lIns="0" rIns="0" tIns="0" bIns="0" anchor="t">
-            <a:spAutoFit/>
-          </a:bodyPr>
-          <a:lstStyle/>
-          <a:p>
-            <a:pPr algn="l">
-              <a:lnSpc>
-                <a:spcPct val="132000"/>
-              </a:lnSpc>
-            </a:pPr>
-            <a:r>
-              <a:rPr sz="1800" b="1" i="0">
-                <a:solidFill>
-                  <a:srgbClr val="1D6B8F"/>
-                </a:solidFill>
-                <a:latin typeface="Verdana"/>
-              </a:rPr>
-              <a:t>Quand ?</a:t>
-            </a:r>
-          </a:p>
-        </p:txBody>
-      </p:sp>
-      <p:sp>
-        <p:nvSpPr>
-          <p:cNvPr id="14" name="TextBox 13"/>
-          <p:cNvSpPr txBox="1"/>
-          <p:nvPr/>
-        </p:nvSpPr>
-        <p:spPr>
-          <a:xfrm>
-            <a:off x="4443636" y="2935224"/>
-            <a:ext cx="6595914" cy="338328"/>
-          </a:xfrm>
-          <a:prstGeom prst="rect">
-            <a:avLst/>
-          </a:prstGeom>
-          <a:noFill/>
-        </p:spPr>
-        <p:txBody>
-          <a:bodyPr wrap="square" lIns="0" rIns="0" tIns="0" bIns="0" anchor="t">
-            <a:spAutoFit/>
-          </a:bodyPr>
-          <a:lstStyle/>
-          <a:p>
-            <a:pPr algn="l">
-              <a:lnSpc>
-                <a:spcPct val="132000"/>
-              </a:lnSpc>
-            </a:pPr>
-            <a:r>
-              <a:rPr sz="1800" b="0" i="0">
-                <a:solidFill>
-                  <a:srgbClr val="3A3D40"/>
-                </a:solidFill>
-                <a:latin typeface="Verdana"/>
-              </a:rPr>
-              <a:t>matin, soir, aux repas, au coucher</a:t>
-            </a:r>
-          </a:p>
-        </p:txBody>
-      </p:sp>
-      <p:sp>
-        <p:nvSpPr>
-          <p:cNvPr id="15" name="Rectangle 14"/>
-          <p:cNvSpPr/>
-          <p:nvPr/>
-        </p:nvSpPr>
-        <p:spPr>
-          <a:xfrm>
-            <a:off x="932688" y="3346704"/>
-            <a:ext cx="10326319" cy="10058"/>
-          </a:xfrm>
-          <a:prstGeom prst="rect">
-            <a:avLst/>
-          </a:prstGeom>
-          <a:solidFill>
-            <a:srgbClr val="EAEAE8"/>
-          </a:solidFill>
-          <a:ln>
-            <a:noFill/>
-          </a:ln>
-          <a:effectLst/>
-        </p:spPr>
-        <p:style>
-          <a:lnRef idx="1">
-            <a:schemeClr val="accent1"/>
-          </a:lnRef>
-          <a:fillRef idx="3">
-            <a:schemeClr val="accent1"/>
-          </a:fillRef>
-          <a:effectRef idx="2">
-            <a:schemeClr val="accent1"/>
-          </a:effectRef>
-          <a:fontRef idx="minor">
-            <a:schemeClr val="lt1"/>
-          </a:fontRef>
-        </p:style>
-        <p:txBody>
-          <a:bodyPr rtlCol="0" anchor="ctr"/>
-          <a:lstStyle/>
-          <a:p/>
-        </p:txBody>
-      </p:sp>
-      <p:sp>
-        <p:nvSpPr>
-          <p:cNvPr id="16" name="TextBox 15"/>
-          <p:cNvSpPr txBox="1"/>
-          <p:nvPr/>
-        </p:nvSpPr>
-        <p:spPr>
-          <a:xfrm>
-            <a:off x="932688" y="3474720"/>
-            <a:ext cx="3291492" cy="338328"/>
-          </a:xfrm>
-          <a:prstGeom prst="rect">
-            <a:avLst/>
-          </a:prstGeom>
-          <a:noFill/>
-        </p:spPr>
-        <p:txBody>
-          <a:bodyPr wrap="square" lIns="0" rIns="0" tIns="0" bIns="0" anchor="t">
-            <a:spAutoFit/>
-          </a:bodyPr>
-          <a:lstStyle/>
-          <a:p>
-            <a:pPr algn="l">
-              <a:lnSpc>
-                <a:spcPct val="132000"/>
-              </a:lnSpc>
-            </a:pPr>
-            <a:r>
-              <a:rPr sz="1800" b="1" i="0">
-                <a:solidFill>
-                  <a:srgbClr val="1D6B8F"/>
-                </a:solidFill>
-                <a:latin typeface="Verdana"/>
-              </a:rPr>
-              <a:t>Combien de temps ?</a:t>
-            </a:r>
-          </a:p>
-        </p:txBody>
-      </p:sp>
-      <p:sp>
-        <p:nvSpPr>
-          <p:cNvPr id="17" name="TextBox 16"/>
-          <p:cNvSpPr txBox="1"/>
-          <p:nvPr/>
-        </p:nvSpPr>
-        <p:spPr>
-          <a:xfrm>
-            <a:off x="4443636" y="3474720"/>
-            <a:ext cx="6595914" cy="338328"/>
-          </a:xfrm>
-          <a:prstGeom prst="rect">
-            <a:avLst/>
-          </a:prstGeom>
-          <a:noFill/>
-        </p:spPr>
-        <p:txBody>
-          <a:bodyPr wrap="square" lIns="0" rIns="0" tIns="0" bIns="0" anchor="t">
-            <a:spAutoFit/>
-          </a:bodyPr>
-          <a:lstStyle/>
-          <a:p>
-            <a:pPr algn="l">
-              <a:lnSpc>
-                <a:spcPct val="132000"/>
-              </a:lnSpc>
-            </a:pPr>
-            <a:r>
-              <a:rPr sz="1800" b="0" i="0">
-                <a:solidFill>
-                  <a:srgbClr val="3A3D40"/>
-                </a:solidFill>
-                <a:latin typeface="Verdana"/>
-              </a:rPr>
-              <a:t>sept jours, dix jours, jusqu'à la fin de la boîte</a:t>
-            </a:r>
-          </a:p>
-        </p:txBody>
-      </p:sp>
-      <p:sp>
-        <p:nvSpPr>
-          <p:cNvPr id="18" name="Rectangle 17"/>
-          <p:cNvSpPr/>
-          <p:nvPr/>
-        </p:nvSpPr>
-        <p:spPr>
-          <a:xfrm>
-            <a:off x="932688" y="3886200"/>
-            <a:ext cx="10326319" cy="10058"/>
-          </a:xfrm>
-          <a:prstGeom prst="rect">
-            <a:avLst/>
-          </a:prstGeom>
-          <a:solidFill>
-            <a:srgbClr val="EAEAE8"/>
-          </a:solidFill>
-          <a:ln>
-            <a:noFill/>
-          </a:ln>
-          <a:effectLst/>
-        </p:spPr>
-        <p:style>
-          <a:lnRef idx="1">
-            <a:schemeClr val="accent1"/>
-          </a:lnRef>
-          <a:fillRef idx="3">
-            <a:schemeClr val="accent1"/>
-          </a:fillRef>
-          <a:effectRef idx="2">
-            <a:schemeClr val="accent1"/>
-          </a:effectRef>
-          <a:fontRef idx="minor">
-            <a:schemeClr val="lt1"/>
-          </a:fontRef>
-        </p:style>
-        <p:txBody>
-          <a:bodyPr rtlCol="0" anchor="ctr"/>
-          <a:lstStyle/>
-          <a:p/>
-        </p:txBody>
-      </p:sp>
-      <p:sp>
-        <p:nvSpPr>
-          <p:cNvPr id="19" name="TextBox 18"/>
-          <p:cNvSpPr txBox="1"/>
-          <p:nvPr/>
-        </p:nvSpPr>
-        <p:spPr>
-          <a:xfrm>
-            <a:off x="932688" y="4014215"/>
-            <a:ext cx="3291492" cy="338328"/>
-          </a:xfrm>
-          <a:prstGeom prst="rect">
-            <a:avLst/>
-          </a:prstGeom>
-          <a:noFill/>
-        </p:spPr>
-        <p:txBody>
-          <a:bodyPr wrap="square" lIns="0" rIns="0" tIns="0" bIns="0" anchor="t">
-            <a:spAutoFit/>
-          </a:bodyPr>
-          <a:lstStyle/>
-          <a:p>
-            <a:pPr algn="l">
-              <a:lnSpc>
-                <a:spcPct val="132000"/>
-              </a:lnSpc>
-            </a:pPr>
-            <a:r>
-              <a:rPr sz="1800" b="1" i="0">
-                <a:solidFill>
-                  <a:srgbClr val="1D6B8F"/>
-                </a:solidFill>
-                <a:latin typeface="Verdana"/>
-              </a:rPr>
-              <a:t>Quoi éviter ?</a:t>
-            </a:r>
-          </a:p>
-        </p:txBody>
-      </p:sp>
-      <p:sp>
-        <p:nvSpPr>
-          <p:cNvPr id="20" name="TextBox 19"/>
-          <p:cNvSpPr txBox="1"/>
-          <p:nvPr/>
-        </p:nvSpPr>
-        <p:spPr>
-          <a:xfrm>
-            <a:off x="4443636" y="4014215"/>
-            <a:ext cx="6595914" cy="338328"/>
-          </a:xfrm>
-          <a:prstGeom prst="rect">
-            <a:avLst/>
-          </a:prstGeom>
-          <a:noFill/>
-        </p:spPr>
-        <p:txBody>
-          <a:bodyPr wrap="square" lIns="0" rIns="0" tIns="0" bIns="0" anchor="t">
-            <a:spAutoFit/>
-          </a:bodyPr>
-          <a:lstStyle/>
-          <a:p>
-            <a:pPr algn="l">
-              <a:lnSpc>
-                <a:spcPct val="132000"/>
-              </a:lnSpc>
-            </a:pPr>
-            <a:r>
-              <a:rPr sz="1800" b="0" i="0">
-                <a:solidFill>
-                  <a:srgbClr val="3A3D40"/>
-                </a:solidFill>
-                <a:latin typeface="Verdana"/>
-              </a:rPr>
-              <a:t>l'alcool, le soleil, la conduite</a:t>
-            </a:r>
-          </a:p>
-        </p:txBody>
-      </p:sp>
-      <p:sp>
-        <p:nvSpPr>
-          <p:cNvPr id="21" name="Rounded Rectangle 20"/>
-          <p:cNvSpPr/>
-          <p:nvPr/>
-        </p:nvSpPr>
-        <p:spPr>
-          <a:xfrm>
-            <a:off x="566928" y="4846320"/>
-            <a:ext cx="11057839" cy="843534"/>
-          </a:xfrm>
-          <a:prstGeom prst="roundRect">
-            <a:avLst>
-              <a:gd name="adj" fmla="val 17344"/>
-            </a:avLst>
-          </a:prstGeom>
-          <a:solidFill>
-            <a:srgbClr val="FBFBFA"/>
-          </a:solidFill>
-          <a:ln w="12700">
-            <a:solidFill>
-              <a:srgbClr val="EAEAE8"/>
-            </a:solidFill>
-          </a:ln>
-          <a:effectLst/>
-        </p:spPr>
-        <p:style>
-          <a:lnRef idx="1">
-            <a:schemeClr val="accent1"/>
-          </a:lnRef>
-          <a:fillRef idx="3">
-            <a:schemeClr val="accent1"/>
-          </a:fillRef>
-          <a:effectRef idx="2">
-            <a:schemeClr val="accent1"/>
-          </a:effectRef>
-          <a:fontRef idx="minor">
-            <a:schemeClr val="lt1"/>
-          </a:fontRef>
-        </p:style>
-        <p:txBody>
-          <a:bodyPr rtlCol="0" anchor="ctr"/>
-          <a:lstStyle/>
-          <a:p/>
-        </p:txBody>
-      </p:sp>
-      <p:sp>
-        <p:nvSpPr>
-          <p:cNvPr id="22" name="TextBox 21"/>
-          <p:cNvSpPr txBox="1"/>
-          <p:nvPr/>
-        </p:nvSpPr>
-        <p:spPr>
-          <a:xfrm>
-            <a:off x="969264" y="5102352"/>
-            <a:ext cx="10234879" cy="386334"/>
-          </a:xfrm>
-          <a:prstGeom prst="rect">
-            <a:avLst/>
-          </a:prstGeom>
-          <a:noFill/>
-        </p:spPr>
-        <p:txBody>
-          <a:bodyPr wrap="square" lIns="0" rIns="0" tIns="0" bIns="0" anchor="t">
-            <a:spAutoFit/>
-          </a:bodyPr>
-          <a:lstStyle/>
-          <a:p>
-            <a:pPr algn="l">
-              <a:lnSpc>
-                <a:spcPct val="145000"/>
-              </a:lnSpc>
-            </a:pPr>
-            <a:r>
-              <a:rPr sz="1800" b="0" i="0">
-                <a:solidFill>
-                  <a:srgbClr val="4B4F52"/>
-                </a:solidFill>
-                <a:latin typeface="Verdana"/>
-              </a:rPr>
-              <a:t>Si une des quatre réponses manque, on la demande avant de partir.</a:t>
-            </a:r>
-          </a:p>
-        </p:txBody>
-      </p:sp>
+      <p:pic>
+        <p:nvPicPr>
+          <p:cNvPr id="9" name="Picture 8" descr="co3.png"/>
+          <p:cNvPicPr>
+            <a:picLocks noChangeAspect="1"/>
+          </p:cNvPicPr>
+          <p:nvPr/>
+        </p:nvPicPr>
+        <p:blipFill>
+          <a:blip r:embed="rId2"/>
+          <a:stretch>
+            <a:fillRect/>
+          </a:stretch>
+        </p:blipFill>
+        <p:spPr>
+          <a:xfrm>
+            <a:off x="1530669" y="2103120"/>
+            <a:ext cx="9130356" cy="4050792"/>
+          </a:xfrm>
+          <a:prstGeom prst="rect">
+            <a:avLst/>
+          </a:prstGeom>
+        </p:spPr>
+      </p:pic>
     </p:spTree>
   </p:cSld>
   <p:clrMapOvr>
@@ -11972,67 +12468,21 @@
                 </a:solidFill>
                 <a:latin typeface="Verdana"/>
               </a:rPr>
-              <a:t>LA RÈGLE DU TRAITEMENT COMPLET</a:t>
-            </a:r>
-          </a:p>
-        </p:txBody>
-      </p:sp>
-      <p:sp>
-        <p:nvSpPr>
-          <p:cNvPr id="6" name="Rounded Rectangle 5"/>
-          <p:cNvSpPr/>
-          <p:nvPr/>
-        </p:nvSpPr>
-        <p:spPr>
-          <a:xfrm>
-            <a:off x="566928" y="1225296"/>
-            <a:ext cx="11057839" cy="1441196"/>
-          </a:xfrm>
-          <a:prstGeom prst="roundRect">
-            <a:avLst>
-              <a:gd name="adj" fmla="val 10151"/>
-            </a:avLst>
-          </a:prstGeom>
-          <a:solidFill>
-            <a:srgbClr val="E7F0F6"/>
-          </a:solidFill>
-          <a:ln w="12700">
-            <a:solidFill>
-              <a:srgbClr val="EAEAE8"/>
-            </a:solidFill>
-          </a:ln>
-          <a:effectLst/>
-        </p:spPr>
-        <p:style>
-          <a:lnRef idx="1">
-            <a:schemeClr val="accent1"/>
-          </a:lnRef>
-          <a:fillRef idx="3">
-            <a:schemeClr val="accent1"/>
-          </a:fillRef>
-          <a:effectRef idx="2">
-            <a:schemeClr val="accent1"/>
-          </a:effectRef>
-          <a:fontRef idx="minor">
-            <a:schemeClr val="lt1"/>
-          </a:fontRef>
-        </p:style>
-        <p:txBody>
-          <a:bodyPr rtlCol="0" anchor="ctr"/>
-          <a:lstStyle/>
-          <a:p/>
-        </p:txBody>
-      </p:sp>
-      <p:sp>
-        <p:nvSpPr>
-          <p:cNvPr id="7" name="TextBox 6"/>
+              <a:t>ANALYSE</a:t>
+            </a:r>
+          </a:p>
+        </p:txBody>
+      </p:sp>
+      <p:sp>
+        <p:nvSpPr>
+          <p:cNvPr id="6" name="TextBox 5"/>
           <p:cNvSpPr txBox="1"/>
           <p:nvPr/>
         </p:nvSpPr>
         <p:spPr>
           <a:xfrm>
-            <a:off x="1298448" y="1682496"/>
-            <a:ext cx="9594799" cy="618235"/>
+            <a:off x="566928" y="749808"/>
+            <a:ext cx="11057839" cy="877824"/>
           </a:xfrm>
           <a:prstGeom prst="rect">
             <a:avLst/>
@@ -12047,35 +12497,35 @@
           <a:p>
             <a:pPr algn="l">
               <a:lnSpc>
-                <a:spcPct val="122000"/>
+                <a:spcPct val="115000"/>
               </a:lnSpc>
             </a:pPr>
             <a:r>
-              <a:rPr sz="3400" b="1" i="0">
+              <a:rPr sz="2900" b="1" i="0">
                 <a:solidFill>
                   <a:srgbClr val="17181A"/>
                 </a:solidFill>
                 <a:latin typeface="Verdana"/>
               </a:rPr>
-              <a:t>On finit la boîte, même si on va mieux.</a:t>
-            </a:r>
-          </a:p>
-        </p:txBody>
-      </p:sp>
-      <p:sp>
-        <p:nvSpPr>
-          <p:cNvPr id="8" name="Rounded Rectangle 7"/>
+              <a:t>Quatre questions à se poser devant un médicament</a:t>
+            </a:r>
+          </a:p>
+        </p:txBody>
+      </p:sp>
+      <p:sp>
+        <p:nvSpPr>
+          <p:cNvPr id="7" name="Rounded Rectangle 6"/>
           <p:cNvSpPr/>
           <p:nvPr/>
         </p:nvSpPr>
         <p:spPr>
           <a:xfrm>
-            <a:off x="566928" y="2940812"/>
-            <a:ext cx="11057839" cy="1303528"/>
+            <a:off x="566928" y="1810512"/>
+            <a:ext cx="11057839" cy="2798064"/>
           </a:xfrm>
           <a:prstGeom prst="roundRect">
             <a:avLst>
-              <a:gd name="adj" fmla="val 11223"/>
+              <a:gd name="adj" fmla="val 5228"/>
             </a:avLst>
           </a:prstGeom>
           <a:solidFill>
@@ -12110,14 +12560,576 @@
       </p:sp>
       <p:sp>
         <p:nvSpPr>
+          <p:cNvPr id="8" name="TextBox 7"/>
+          <p:cNvSpPr txBox="1"/>
+          <p:nvPr/>
+        </p:nvSpPr>
+        <p:spPr>
+          <a:xfrm>
+            <a:off x="932688" y="1975104"/>
+            <a:ext cx="3291492" cy="237744"/>
+          </a:xfrm>
+          <a:prstGeom prst="rect">
+            <a:avLst/>
+          </a:prstGeom>
+          <a:noFill/>
+        </p:spPr>
+        <p:txBody>
+          <a:bodyPr wrap="square" lIns="0" rIns="0" tIns="0" bIns="0" anchor="t">
+            <a:spAutoFit/>
+          </a:bodyPr>
+          <a:lstStyle/>
+          <a:p>
+            <a:pPr algn="l">
+              <a:lnSpc>
+                <a:spcPct val="135000"/>
+              </a:lnSpc>
+            </a:pPr>
+            <a:r>
+              <a:rPr sz="1300" b="1" i="0" spc="156">
+                <a:solidFill>
+                  <a:srgbClr val="6E7175"/>
+                </a:solidFill>
+                <a:latin typeface="Verdana"/>
+              </a:rPr>
+              <a:t>LA QUESTION</a:t>
+            </a:r>
+          </a:p>
+        </p:txBody>
+      </p:sp>
+      <p:sp>
+        <p:nvSpPr>
           <p:cNvPr id="9" name="TextBox 8"/>
           <p:cNvSpPr txBox="1"/>
           <p:nvPr/>
         </p:nvSpPr>
         <p:spPr>
           <a:xfrm>
-            <a:off x="969264" y="3215132"/>
-            <a:ext cx="10234879" cy="846327"/>
+            <a:off x="4443636" y="1975104"/>
+            <a:ext cx="6595914" cy="237744"/>
+          </a:xfrm>
+          <a:prstGeom prst="rect">
+            <a:avLst/>
+          </a:prstGeom>
+          <a:noFill/>
+        </p:spPr>
+        <p:txBody>
+          <a:bodyPr wrap="square" lIns="0" rIns="0" tIns="0" bIns="0" anchor="t">
+            <a:spAutoFit/>
+          </a:bodyPr>
+          <a:lstStyle/>
+          <a:p>
+            <a:pPr algn="l">
+              <a:lnSpc>
+                <a:spcPct val="135000"/>
+              </a:lnSpc>
+            </a:pPr>
+            <a:r>
+              <a:rPr sz="1300" b="1" i="0" spc="156">
+                <a:solidFill>
+                  <a:srgbClr val="6E7175"/>
+                </a:solidFill>
+                <a:latin typeface="Verdana"/>
+              </a:rPr>
+              <a:t>CE QU'ON CHERCHE SUR L'ÉTIQUETTE</a:t>
+            </a:r>
+          </a:p>
+        </p:txBody>
+      </p:sp>
+      <p:sp>
+        <p:nvSpPr>
+          <p:cNvPr id="10" name="TextBox 9"/>
+          <p:cNvSpPr txBox="1"/>
+          <p:nvPr/>
+        </p:nvSpPr>
+        <p:spPr>
+          <a:xfrm>
+            <a:off x="932688" y="2395728"/>
+            <a:ext cx="3291492" cy="338328"/>
+          </a:xfrm>
+          <a:prstGeom prst="rect">
+            <a:avLst/>
+          </a:prstGeom>
+          <a:noFill/>
+        </p:spPr>
+        <p:txBody>
+          <a:bodyPr wrap="square" lIns="0" rIns="0" tIns="0" bIns="0" anchor="t">
+            <a:spAutoFit/>
+          </a:bodyPr>
+          <a:lstStyle/>
+          <a:p>
+            <a:pPr algn="l">
+              <a:lnSpc>
+                <a:spcPct val="132000"/>
+              </a:lnSpc>
+            </a:pPr>
+            <a:r>
+              <a:rPr sz="1800" b="1" i="0">
+                <a:solidFill>
+                  <a:srgbClr val="1D6B8F"/>
+                </a:solidFill>
+                <a:latin typeface="Verdana"/>
+              </a:rPr>
+              <a:t>Combien ?</a:t>
+            </a:r>
+          </a:p>
+        </p:txBody>
+      </p:sp>
+      <p:sp>
+        <p:nvSpPr>
+          <p:cNvPr id="11" name="TextBox 10"/>
+          <p:cNvSpPr txBox="1"/>
+          <p:nvPr/>
+        </p:nvSpPr>
+        <p:spPr>
+          <a:xfrm>
+            <a:off x="4443636" y="2395728"/>
+            <a:ext cx="6595914" cy="338328"/>
+          </a:xfrm>
+          <a:prstGeom prst="rect">
+            <a:avLst/>
+          </a:prstGeom>
+          <a:noFill/>
+        </p:spPr>
+        <p:txBody>
+          <a:bodyPr wrap="square" lIns="0" rIns="0" tIns="0" bIns="0" anchor="t">
+            <a:spAutoFit/>
+          </a:bodyPr>
+          <a:lstStyle/>
+          <a:p>
+            <a:pPr algn="l">
+              <a:lnSpc>
+                <a:spcPct val="132000"/>
+              </a:lnSpc>
+            </a:pPr>
+            <a:r>
+              <a:rPr sz="1800" b="0" i="0">
+                <a:solidFill>
+                  <a:srgbClr val="3A3D40"/>
+                </a:solidFill>
+                <a:latin typeface="Verdana"/>
+              </a:rPr>
+              <a:t>un comprimé, deux comprimés, une cuillère</a:t>
+            </a:r>
+          </a:p>
+        </p:txBody>
+      </p:sp>
+      <p:sp>
+        <p:nvSpPr>
+          <p:cNvPr id="12" name="Rectangle 11"/>
+          <p:cNvSpPr/>
+          <p:nvPr/>
+        </p:nvSpPr>
+        <p:spPr>
+          <a:xfrm>
+            <a:off x="932688" y="2807208"/>
+            <a:ext cx="10326319" cy="10058"/>
+          </a:xfrm>
+          <a:prstGeom prst="rect">
+            <a:avLst/>
+          </a:prstGeom>
+          <a:solidFill>
+            <a:srgbClr val="EAEAE8"/>
+          </a:solidFill>
+          <a:ln>
+            <a:noFill/>
+          </a:ln>
+          <a:effectLst/>
+        </p:spPr>
+        <p:style>
+          <a:lnRef idx="1">
+            <a:schemeClr val="accent1"/>
+          </a:lnRef>
+          <a:fillRef idx="3">
+            <a:schemeClr val="accent1"/>
+          </a:fillRef>
+          <a:effectRef idx="2">
+            <a:schemeClr val="accent1"/>
+          </a:effectRef>
+          <a:fontRef idx="minor">
+            <a:schemeClr val="lt1"/>
+          </a:fontRef>
+        </p:style>
+        <p:txBody>
+          <a:bodyPr rtlCol="0" anchor="ctr"/>
+          <a:lstStyle/>
+          <a:p/>
+        </p:txBody>
+      </p:sp>
+      <p:sp>
+        <p:nvSpPr>
+          <p:cNvPr id="13" name="TextBox 12"/>
+          <p:cNvSpPr txBox="1"/>
+          <p:nvPr/>
+        </p:nvSpPr>
+        <p:spPr>
+          <a:xfrm>
+            <a:off x="932688" y="2935224"/>
+            <a:ext cx="3291492" cy="338328"/>
+          </a:xfrm>
+          <a:prstGeom prst="rect">
+            <a:avLst/>
+          </a:prstGeom>
+          <a:noFill/>
+        </p:spPr>
+        <p:txBody>
+          <a:bodyPr wrap="square" lIns="0" rIns="0" tIns="0" bIns="0" anchor="t">
+            <a:spAutoFit/>
+          </a:bodyPr>
+          <a:lstStyle/>
+          <a:p>
+            <a:pPr algn="l">
+              <a:lnSpc>
+                <a:spcPct val="132000"/>
+              </a:lnSpc>
+            </a:pPr>
+            <a:r>
+              <a:rPr sz="1800" b="1" i="0">
+                <a:solidFill>
+                  <a:srgbClr val="1D6B8F"/>
+                </a:solidFill>
+                <a:latin typeface="Verdana"/>
+              </a:rPr>
+              <a:t>Quand ?</a:t>
+            </a:r>
+          </a:p>
+        </p:txBody>
+      </p:sp>
+      <p:sp>
+        <p:nvSpPr>
+          <p:cNvPr id="14" name="TextBox 13"/>
+          <p:cNvSpPr txBox="1"/>
+          <p:nvPr/>
+        </p:nvSpPr>
+        <p:spPr>
+          <a:xfrm>
+            <a:off x="4443636" y="2935224"/>
+            <a:ext cx="6595914" cy="338328"/>
+          </a:xfrm>
+          <a:prstGeom prst="rect">
+            <a:avLst/>
+          </a:prstGeom>
+          <a:noFill/>
+        </p:spPr>
+        <p:txBody>
+          <a:bodyPr wrap="square" lIns="0" rIns="0" tIns="0" bIns="0" anchor="t">
+            <a:spAutoFit/>
+          </a:bodyPr>
+          <a:lstStyle/>
+          <a:p>
+            <a:pPr algn="l">
+              <a:lnSpc>
+                <a:spcPct val="132000"/>
+              </a:lnSpc>
+            </a:pPr>
+            <a:r>
+              <a:rPr sz="1800" b="0" i="0">
+                <a:solidFill>
+                  <a:srgbClr val="3A3D40"/>
+                </a:solidFill>
+                <a:latin typeface="Verdana"/>
+              </a:rPr>
+              <a:t>matin, soir, aux repas, au coucher</a:t>
+            </a:r>
+          </a:p>
+        </p:txBody>
+      </p:sp>
+      <p:sp>
+        <p:nvSpPr>
+          <p:cNvPr id="15" name="Rectangle 14"/>
+          <p:cNvSpPr/>
+          <p:nvPr/>
+        </p:nvSpPr>
+        <p:spPr>
+          <a:xfrm>
+            <a:off x="932688" y="3346704"/>
+            <a:ext cx="10326319" cy="10058"/>
+          </a:xfrm>
+          <a:prstGeom prst="rect">
+            <a:avLst/>
+          </a:prstGeom>
+          <a:solidFill>
+            <a:srgbClr val="EAEAE8"/>
+          </a:solidFill>
+          <a:ln>
+            <a:noFill/>
+          </a:ln>
+          <a:effectLst/>
+        </p:spPr>
+        <p:style>
+          <a:lnRef idx="1">
+            <a:schemeClr val="accent1"/>
+          </a:lnRef>
+          <a:fillRef idx="3">
+            <a:schemeClr val="accent1"/>
+          </a:fillRef>
+          <a:effectRef idx="2">
+            <a:schemeClr val="accent1"/>
+          </a:effectRef>
+          <a:fontRef idx="minor">
+            <a:schemeClr val="lt1"/>
+          </a:fontRef>
+        </p:style>
+        <p:txBody>
+          <a:bodyPr rtlCol="0" anchor="ctr"/>
+          <a:lstStyle/>
+          <a:p/>
+        </p:txBody>
+      </p:sp>
+      <p:sp>
+        <p:nvSpPr>
+          <p:cNvPr id="16" name="TextBox 15"/>
+          <p:cNvSpPr txBox="1"/>
+          <p:nvPr/>
+        </p:nvSpPr>
+        <p:spPr>
+          <a:xfrm>
+            <a:off x="932688" y="3474720"/>
+            <a:ext cx="3291492" cy="338328"/>
+          </a:xfrm>
+          <a:prstGeom prst="rect">
+            <a:avLst/>
+          </a:prstGeom>
+          <a:noFill/>
+        </p:spPr>
+        <p:txBody>
+          <a:bodyPr wrap="square" lIns="0" rIns="0" tIns="0" bIns="0" anchor="t">
+            <a:spAutoFit/>
+          </a:bodyPr>
+          <a:lstStyle/>
+          <a:p>
+            <a:pPr algn="l">
+              <a:lnSpc>
+                <a:spcPct val="132000"/>
+              </a:lnSpc>
+            </a:pPr>
+            <a:r>
+              <a:rPr sz="1800" b="1" i="0">
+                <a:solidFill>
+                  <a:srgbClr val="1D6B8F"/>
+                </a:solidFill>
+                <a:latin typeface="Verdana"/>
+              </a:rPr>
+              <a:t>Combien de temps ?</a:t>
+            </a:r>
+          </a:p>
+        </p:txBody>
+      </p:sp>
+      <p:sp>
+        <p:nvSpPr>
+          <p:cNvPr id="17" name="TextBox 16"/>
+          <p:cNvSpPr txBox="1"/>
+          <p:nvPr/>
+        </p:nvSpPr>
+        <p:spPr>
+          <a:xfrm>
+            <a:off x="4443636" y="3474720"/>
+            <a:ext cx="6595914" cy="338328"/>
+          </a:xfrm>
+          <a:prstGeom prst="rect">
+            <a:avLst/>
+          </a:prstGeom>
+          <a:noFill/>
+        </p:spPr>
+        <p:txBody>
+          <a:bodyPr wrap="square" lIns="0" rIns="0" tIns="0" bIns="0" anchor="t">
+            <a:spAutoFit/>
+          </a:bodyPr>
+          <a:lstStyle/>
+          <a:p>
+            <a:pPr algn="l">
+              <a:lnSpc>
+                <a:spcPct val="132000"/>
+              </a:lnSpc>
+            </a:pPr>
+            <a:r>
+              <a:rPr sz="1800" b="0" i="0">
+                <a:solidFill>
+                  <a:srgbClr val="3A3D40"/>
+                </a:solidFill>
+                <a:latin typeface="Verdana"/>
+              </a:rPr>
+              <a:t>sept jours, dix jours, jusqu'à la fin de la boîte</a:t>
+            </a:r>
+          </a:p>
+        </p:txBody>
+      </p:sp>
+      <p:sp>
+        <p:nvSpPr>
+          <p:cNvPr id="18" name="Rectangle 17"/>
+          <p:cNvSpPr/>
+          <p:nvPr/>
+        </p:nvSpPr>
+        <p:spPr>
+          <a:xfrm>
+            <a:off x="932688" y="3886200"/>
+            <a:ext cx="10326319" cy="10058"/>
+          </a:xfrm>
+          <a:prstGeom prst="rect">
+            <a:avLst/>
+          </a:prstGeom>
+          <a:solidFill>
+            <a:srgbClr val="EAEAE8"/>
+          </a:solidFill>
+          <a:ln>
+            <a:noFill/>
+          </a:ln>
+          <a:effectLst/>
+        </p:spPr>
+        <p:style>
+          <a:lnRef idx="1">
+            <a:schemeClr val="accent1"/>
+          </a:lnRef>
+          <a:fillRef idx="3">
+            <a:schemeClr val="accent1"/>
+          </a:fillRef>
+          <a:effectRef idx="2">
+            <a:schemeClr val="accent1"/>
+          </a:effectRef>
+          <a:fontRef idx="minor">
+            <a:schemeClr val="lt1"/>
+          </a:fontRef>
+        </p:style>
+        <p:txBody>
+          <a:bodyPr rtlCol="0" anchor="ctr"/>
+          <a:lstStyle/>
+          <a:p/>
+        </p:txBody>
+      </p:sp>
+      <p:sp>
+        <p:nvSpPr>
+          <p:cNvPr id="19" name="TextBox 18"/>
+          <p:cNvSpPr txBox="1"/>
+          <p:nvPr/>
+        </p:nvSpPr>
+        <p:spPr>
+          <a:xfrm>
+            <a:off x="932688" y="4014215"/>
+            <a:ext cx="3291492" cy="338328"/>
+          </a:xfrm>
+          <a:prstGeom prst="rect">
+            <a:avLst/>
+          </a:prstGeom>
+          <a:noFill/>
+        </p:spPr>
+        <p:txBody>
+          <a:bodyPr wrap="square" lIns="0" rIns="0" tIns="0" bIns="0" anchor="t">
+            <a:spAutoFit/>
+          </a:bodyPr>
+          <a:lstStyle/>
+          <a:p>
+            <a:pPr algn="l">
+              <a:lnSpc>
+                <a:spcPct val="132000"/>
+              </a:lnSpc>
+            </a:pPr>
+            <a:r>
+              <a:rPr sz="1800" b="1" i="0">
+                <a:solidFill>
+                  <a:srgbClr val="1D6B8F"/>
+                </a:solidFill>
+                <a:latin typeface="Verdana"/>
+              </a:rPr>
+              <a:t>Quoi éviter ?</a:t>
+            </a:r>
+          </a:p>
+        </p:txBody>
+      </p:sp>
+      <p:sp>
+        <p:nvSpPr>
+          <p:cNvPr id="20" name="TextBox 19"/>
+          <p:cNvSpPr txBox="1"/>
+          <p:nvPr/>
+        </p:nvSpPr>
+        <p:spPr>
+          <a:xfrm>
+            <a:off x="4443636" y="4014215"/>
+            <a:ext cx="6595914" cy="338328"/>
+          </a:xfrm>
+          <a:prstGeom prst="rect">
+            <a:avLst/>
+          </a:prstGeom>
+          <a:noFill/>
+        </p:spPr>
+        <p:txBody>
+          <a:bodyPr wrap="square" lIns="0" rIns="0" tIns="0" bIns="0" anchor="t">
+            <a:spAutoFit/>
+          </a:bodyPr>
+          <a:lstStyle/>
+          <a:p>
+            <a:pPr algn="l">
+              <a:lnSpc>
+                <a:spcPct val="132000"/>
+              </a:lnSpc>
+            </a:pPr>
+            <a:r>
+              <a:rPr sz="1800" b="0" i="0">
+                <a:solidFill>
+                  <a:srgbClr val="3A3D40"/>
+                </a:solidFill>
+                <a:latin typeface="Verdana"/>
+              </a:rPr>
+              <a:t>l'alcool, le soleil, la conduite</a:t>
+            </a:r>
+          </a:p>
+        </p:txBody>
+      </p:sp>
+      <p:sp>
+        <p:nvSpPr>
+          <p:cNvPr id="21" name="Rounded Rectangle 20"/>
+          <p:cNvSpPr/>
+          <p:nvPr/>
+        </p:nvSpPr>
+        <p:spPr>
+          <a:xfrm>
+            <a:off x="566928" y="4846320"/>
+            <a:ext cx="11057839" cy="843534"/>
+          </a:xfrm>
+          <a:prstGeom prst="roundRect">
+            <a:avLst>
+              <a:gd name="adj" fmla="val 17344"/>
+            </a:avLst>
+          </a:prstGeom>
+          <a:solidFill>
+            <a:srgbClr val="FBFBFA"/>
+          </a:solidFill>
+          <a:ln w="12700">
+            <a:solidFill>
+              <a:srgbClr val="EAEAE8"/>
+            </a:solidFill>
+          </a:ln>
+          <a:effectLst/>
+        </p:spPr>
+        <p:style>
+          <a:lnRef idx="1">
+            <a:schemeClr val="accent1"/>
+          </a:lnRef>
+          <a:fillRef idx="3">
+            <a:schemeClr val="accent1"/>
+          </a:fillRef>
+          <a:effectRef idx="2">
+            <a:schemeClr val="accent1"/>
+          </a:effectRef>
+          <a:fontRef idx="minor">
+            <a:schemeClr val="lt1"/>
+          </a:fontRef>
+        </p:style>
+        <p:txBody>
+          <a:bodyPr rtlCol="0" anchor="ctr"/>
+          <a:lstStyle/>
+          <a:p/>
+        </p:txBody>
+      </p:sp>
+      <p:sp>
+        <p:nvSpPr>
+          <p:cNvPr id="22" name="TextBox 21"/>
+          <p:cNvSpPr txBox="1"/>
+          <p:nvPr/>
+        </p:nvSpPr>
+        <p:spPr>
+          <a:xfrm>
+            <a:off x="969264" y="5102352"/>
+            <a:ext cx="10234879" cy="386334"/>
           </a:xfrm>
           <a:prstGeom prst="rect">
             <a:avLst/>
@@ -12136,13 +13148,13 @@
               </a:lnSpc>
             </a:pPr>
             <a:r>
-              <a:rPr sz="2000" b="0" i="0">
+              <a:rPr sz="1800" b="0" i="0">
                 <a:solidFill>
                   <a:srgbClr val="4B4F52"/>
                 </a:solidFill>
                 <a:latin typeface="Verdana"/>
               </a:rPr>
-              <a:t>Pour un antibiotique surtout : arrêter dès qu'on se sent mieux laisse survivre les bactéries les plus résistantes, et l'infection revient plus forte.</a:t>
+              <a:t>Si une des quatre réponses manque, on la demande avant de partir.</a:t>
             </a:r>
           </a:p>
         </p:txBody>
@@ -12319,21 +13331,67 @@
                 </a:solidFill>
                 <a:latin typeface="Verdana"/>
               </a:rPr>
-              <a:t>ANALYSE</a:t>
-            </a:r>
-          </a:p>
-        </p:txBody>
-      </p:sp>
-      <p:sp>
-        <p:nvSpPr>
-          <p:cNvPr id="6" name="TextBox 5"/>
+              <a:t>LA RÈGLE DU TRAITEMENT COMPLET</a:t>
+            </a:r>
+          </a:p>
+        </p:txBody>
+      </p:sp>
+      <p:sp>
+        <p:nvSpPr>
+          <p:cNvPr id="6" name="Rounded Rectangle 5"/>
+          <p:cNvSpPr/>
+          <p:nvPr/>
+        </p:nvSpPr>
+        <p:spPr>
+          <a:xfrm>
+            <a:off x="566928" y="1225296"/>
+            <a:ext cx="11057839" cy="1441196"/>
+          </a:xfrm>
+          <a:prstGeom prst="roundRect">
+            <a:avLst>
+              <a:gd name="adj" fmla="val 10151"/>
+            </a:avLst>
+          </a:prstGeom>
+          <a:solidFill>
+            <a:srgbClr val="E7F0F6"/>
+          </a:solidFill>
+          <a:ln w="12700">
+            <a:solidFill>
+              <a:srgbClr val="EAEAE8"/>
+            </a:solidFill>
+          </a:ln>
+          <a:effectLst/>
+        </p:spPr>
+        <p:style>
+          <a:lnRef idx="1">
+            <a:schemeClr val="accent1"/>
+          </a:lnRef>
+          <a:fillRef idx="3">
+            <a:schemeClr val="accent1"/>
+          </a:fillRef>
+          <a:effectRef idx="2">
+            <a:schemeClr val="accent1"/>
+          </a:effectRef>
+          <a:fontRef idx="minor">
+            <a:schemeClr val="lt1"/>
+          </a:fontRef>
+        </p:style>
+        <p:txBody>
+          <a:bodyPr rtlCol="0" anchor="ctr"/>
+          <a:lstStyle/>
+          <a:p/>
+        </p:txBody>
+      </p:sp>
+      <p:sp>
+        <p:nvSpPr>
+          <p:cNvPr id="7" name="TextBox 6"/>
           <p:cNvSpPr txBox="1"/>
           <p:nvPr/>
         </p:nvSpPr>
         <p:spPr>
           <a:xfrm>
-            <a:off x="566928" y="749808"/>
-            <a:ext cx="11057839" cy="877824"/>
+            <a:off x="1298448" y="1682496"/>
+            <a:ext cx="9594799" cy="618235"/>
           </a:xfrm>
           <a:prstGeom prst="rect">
             <a:avLst/>
@@ -12348,7 +13406,7 @@
           <a:p>
             <a:pPr algn="l">
               <a:lnSpc>
-                <a:spcPct val="115000"/>
+                <a:spcPct val="122000"/>
               </a:lnSpc>
             </a:pPr>
             <a:r>
@@ -12358,25 +13416,25 @@
                 </a:solidFill>
                 <a:latin typeface="Verdana"/>
               </a:rPr>
-              <a:t>Les mots de l'étiquette</a:t>
-            </a:r>
-          </a:p>
-        </p:txBody>
-      </p:sp>
-      <p:sp>
-        <p:nvSpPr>
-          <p:cNvPr id="7" name="Rounded Rectangle 6"/>
+              <a:t>On finit la boîte, même si on va mieux.</a:t>
+            </a:r>
+          </a:p>
+        </p:txBody>
+      </p:sp>
+      <p:sp>
+        <p:nvSpPr>
+          <p:cNvPr id="8" name="Rounded Rectangle 7"/>
           <p:cNvSpPr/>
           <p:nvPr/>
         </p:nvSpPr>
         <p:spPr>
           <a:xfrm>
-            <a:off x="566928" y="1810512"/>
-            <a:ext cx="5446623" cy="2052828"/>
+            <a:off x="566928" y="2940812"/>
+            <a:ext cx="11057839" cy="1303528"/>
           </a:xfrm>
           <a:prstGeom prst="roundRect">
             <a:avLst>
-              <a:gd name="adj" fmla="val 7126"/>
+              <a:gd name="adj" fmla="val 11223"/>
             </a:avLst>
           </a:prstGeom>
           <a:solidFill>
@@ -12411,14 +13469,14 @@
       </p:sp>
       <p:sp>
         <p:nvSpPr>
-          <p:cNvPr id="8" name="TextBox 7"/>
+          <p:cNvPr id="9" name="TextBox 8"/>
           <p:cNvSpPr txBox="1"/>
           <p:nvPr/>
         </p:nvSpPr>
         <p:spPr>
           <a:xfrm>
-            <a:off x="886968" y="2084831"/>
-            <a:ext cx="4806543" cy="387096"/>
+            <a:off x="969264" y="3215132"/>
+            <a:ext cx="10234879" cy="846327"/>
           </a:xfrm>
           <a:prstGeom prst="rect">
             <a:avLst/>
@@ -12433,428 +13491,17 @@
           <a:p>
             <a:pPr algn="l">
               <a:lnSpc>
-                <a:spcPct val="118000"/>
+                <a:spcPct val="145000"/>
               </a:lnSpc>
             </a:pPr>
             <a:r>
-              <a:rPr sz="2400" b="1" i="0">
-                <a:solidFill>
-                  <a:srgbClr val="1D6B8F"/>
-                </a:solidFill>
-                <a:latin typeface="Verdana"/>
-              </a:rPr>
-              <a:t>par voie orale</a:t>
-            </a:r>
-          </a:p>
-        </p:txBody>
-      </p:sp>
-      <p:sp>
-        <p:nvSpPr>
-          <p:cNvPr id="9" name="TextBox 8"/>
-          <p:cNvSpPr txBox="1"/>
-          <p:nvPr/>
-        </p:nvSpPr>
-        <p:spPr>
-          <a:xfrm>
-            <a:off x="886968" y="2499360"/>
-            <a:ext cx="4806543" cy="1089660"/>
-          </a:xfrm>
-          <a:prstGeom prst="rect">
-            <a:avLst/>
-          </a:prstGeom>
-          <a:noFill/>
-        </p:spPr>
-        <p:txBody>
-          <a:bodyPr wrap="square" lIns="0" rIns="0" tIns="0" bIns="0" anchor="t">
-            <a:spAutoFit/>
-          </a:bodyPr>
-          <a:lstStyle/>
-          <a:p>
-            <a:pPr algn="l">
-              <a:lnSpc>
-                <a:spcPct val="142000"/>
-              </a:lnSpc>
-            </a:pPr>
-            <a:r>
-              <a:rPr sz="1800" b="0" i="0">
-                <a:solidFill>
-                  <a:srgbClr val="3A3D40"/>
-                </a:solidFill>
-                <a:latin typeface="Verdana"/>
-              </a:rPr>
-              <a:t>Par la bouche. S'oppose à « en application locale », sur la peau.</a:t>
-            </a:r>
-          </a:p>
-        </p:txBody>
-      </p:sp>
-      <p:sp>
-        <p:nvSpPr>
-          <p:cNvPr id="10" name="Rounded Rectangle 9"/>
-          <p:cNvSpPr/>
-          <p:nvPr/>
-        </p:nvSpPr>
-        <p:spPr>
-          <a:xfrm>
-            <a:off x="6178143" y="1810512"/>
-            <a:ext cx="5446623" cy="2052828"/>
-          </a:xfrm>
-          <a:prstGeom prst="roundRect">
-            <a:avLst>
-              <a:gd name="adj" fmla="val 7126"/>
-            </a:avLst>
-          </a:prstGeom>
-          <a:solidFill>
-            <a:srgbClr val="FFFFFF"/>
-          </a:solidFill>
-          <a:ln w="12700">
-            <a:solidFill>
-              <a:srgbClr val="EAEAE8"/>
-            </a:solidFill>
-          </a:ln>
-          <a:effectLst/>
-        </p:spPr>
-        <p:style>
-          <a:lnRef idx="1">
-            <a:schemeClr val="accent1"/>
-          </a:lnRef>
-          <a:fillRef idx="3">
-            <a:schemeClr val="accent1"/>
-          </a:fillRef>
-          <a:effectRef idx="2">
-            <a:schemeClr val="accent1"/>
-          </a:effectRef>
-          <a:fontRef idx="minor">
-            <a:schemeClr val="lt1"/>
-          </a:fontRef>
-        </p:style>
-        <p:txBody>
-          <a:bodyPr rtlCol="0" anchor="ctr"/>
-          <a:lstStyle/>
-          <a:p/>
-        </p:txBody>
-      </p:sp>
-      <p:sp>
-        <p:nvSpPr>
-          <p:cNvPr id="11" name="TextBox 10"/>
-          <p:cNvSpPr txBox="1"/>
-          <p:nvPr/>
-        </p:nvSpPr>
-        <p:spPr>
-          <a:xfrm>
-            <a:off x="6498183" y="2084831"/>
-            <a:ext cx="4806543" cy="387096"/>
-          </a:xfrm>
-          <a:prstGeom prst="rect">
-            <a:avLst/>
-          </a:prstGeom>
-          <a:noFill/>
-        </p:spPr>
-        <p:txBody>
-          <a:bodyPr wrap="square" lIns="0" rIns="0" tIns="0" bIns="0" anchor="t">
-            <a:spAutoFit/>
-          </a:bodyPr>
-          <a:lstStyle/>
-          <a:p>
-            <a:pPr algn="l">
-              <a:lnSpc>
-                <a:spcPct val="118000"/>
-              </a:lnSpc>
-            </a:pPr>
-            <a:r>
-              <a:rPr sz="2400" b="1" i="0">
-                <a:solidFill>
-                  <a:srgbClr val="1D6B8F"/>
-                </a:solidFill>
-                <a:latin typeface="Verdana"/>
-              </a:rPr>
-              <a:t>au besoin</a:t>
-            </a:r>
-          </a:p>
-        </p:txBody>
-      </p:sp>
-      <p:sp>
-        <p:nvSpPr>
-          <p:cNvPr id="12" name="TextBox 11"/>
-          <p:cNvSpPr txBox="1"/>
-          <p:nvPr/>
-        </p:nvSpPr>
-        <p:spPr>
-          <a:xfrm>
-            <a:off x="6498183" y="2499360"/>
-            <a:ext cx="4806543" cy="1089660"/>
-          </a:xfrm>
-          <a:prstGeom prst="rect">
-            <a:avLst/>
-          </a:prstGeom>
-          <a:noFill/>
-        </p:spPr>
-        <p:txBody>
-          <a:bodyPr wrap="square" lIns="0" rIns="0" tIns="0" bIns="0" anchor="t">
-            <a:spAutoFit/>
-          </a:bodyPr>
-          <a:lstStyle/>
-          <a:p>
-            <a:pPr algn="l">
-              <a:lnSpc>
-                <a:spcPct val="142000"/>
-              </a:lnSpc>
-            </a:pPr>
-            <a:r>
-              <a:rPr sz="1800" b="0" i="0">
-                <a:solidFill>
-                  <a:srgbClr val="3A3D40"/>
-                </a:solidFill>
-                <a:latin typeface="Verdana"/>
-              </a:rPr>
-              <a:t>Seulement si vous avez mal. Ce n'est pas obligatoire, contrairement à un antibiotique.</a:t>
-            </a:r>
-          </a:p>
-        </p:txBody>
-      </p:sp>
-      <p:sp>
-        <p:nvSpPr>
-          <p:cNvPr id="13" name="Rounded Rectangle 12"/>
-          <p:cNvSpPr/>
-          <p:nvPr/>
-        </p:nvSpPr>
-        <p:spPr>
-          <a:xfrm>
-            <a:off x="566928" y="4027932"/>
-            <a:ext cx="5446623" cy="2052828"/>
-          </a:xfrm>
-          <a:prstGeom prst="roundRect">
-            <a:avLst>
-              <a:gd name="adj" fmla="val 7126"/>
-            </a:avLst>
-          </a:prstGeom>
-          <a:solidFill>
-            <a:srgbClr val="FFFFFF"/>
-          </a:solidFill>
-          <a:ln w="12700">
-            <a:solidFill>
-              <a:srgbClr val="EAEAE8"/>
-            </a:solidFill>
-          </a:ln>
-          <a:effectLst/>
-        </p:spPr>
-        <p:style>
-          <a:lnRef idx="1">
-            <a:schemeClr val="accent1"/>
-          </a:lnRef>
-          <a:fillRef idx="3">
-            <a:schemeClr val="accent1"/>
-          </a:fillRef>
-          <a:effectRef idx="2">
-            <a:schemeClr val="accent1"/>
-          </a:effectRef>
-          <a:fontRef idx="minor">
-            <a:schemeClr val="lt1"/>
-          </a:fontRef>
-        </p:style>
-        <p:txBody>
-          <a:bodyPr rtlCol="0" anchor="ctr"/>
-          <a:lstStyle/>
-          <a:p/>
-        </p:txBody>
-      </p:sp>
-      <p:sp>
-        <p:nvSpPr>
-          <p:cNvPr id="14" name="TextBox 13"/>
-          <p:cNvSpPr txBox="1"/>
-          <p:nvPr/>
-        </p:nvSpPr>
-        <p:spPr>
-          <a:xfrm>
-            <a:off x="886968" y="4302252"/>
-            <a:ext cx="4806543" cy="387096"/>
-          </a:xfrm>
-          <a:prstGeom prst="rect">
-            <a:avLst/>
-          </a:prstGeom>
-          <a:noFill/>
-        </p:spPr>
-        <p:txBody>
-          <a:bodyPr wrap="square" lIns="0" rIns="0" tIns="0" bIns="0" anchor="t">
-            <a:spAutoFit/>
-          </a:bodyPr>
-          <a:lstStyle/>
-          <a:p>
-            <a:pPr algn="l">
-              <a:lnSpc>
-                <a:spcPct val="118000"/>
-              </a:lnSpc>
-            </a:pPr>
-            <a:r>
-              <a:rPr sz="2400" b="1" i="0">
-                <a:solidFill>
-                  <a:srgbClr val="1D6B8F"/>
-                </a:solidFill>
-                <a:latin typeface="Verdana"/>
-              </a:rPr>
-              <a:t>à jeun</a:t>
-            </a:r>
-          </a:p>
-        </p:txBody>
-      </p:sp>
-      <p:sp>
-        <p:nvSpPr>
-          <p:cNvPr id="15" name="TextBox 14"/>
-          <p:cNvSpPr txBox="1"/>
-          <p:nvPr/>
-        </p:nvSpPr>
-        <p:spPr>
-          <a:xfrm>
-            <a:off x="886968" y="4716780"/>
-            <a:ext cx="4806543" cy="1089660"/>
-          </a:xfrm>
-          <a:prstGeom prst="rect">
-            <a:avLst/>
-          </a:prstGeom>
-          <a:noFill/>
-        </p:spPr>
-        <p:txBody>
-          <a:bodyPr wrap="square" lIns="0" rIns="0" tIns="0" bIns="0" anchor="t">
-            <a:spAutoFit/>
-          </a:bodyPr>
-          <a:lstStyle/>
-          <a:p>
-            <a:pPr algn="l">
-              <a:lnSpc>
-                <a:spcPct val="142000"/>
-              </a:lnSpc>
-            </a:pPr>
-            <a:r>
-              <a:rPr sz="1800" b="0" i="0">
-                <a:solidFill>
-                  <a:srgbClr val="3A3D40"/>
-                </a:solidFill>
-                <a:latin typeface="Verdana"/>
-              </a:rPr>
-              <a:t>L'estomac vide, souvent une heure avant le repas.</a:t>
-            </a:r>
-          </a:p>
-        </p:txBody>
-      </p:sp>
-      <p:sp>
-        <p:nvSpPr>
-          <p:cNvPr id="16" name="Rounded Rectangle 15"/>
-          <p:cNvSpPr/>
-          <p:nvPr/>
-        </p:nvSpPr>
-        <p:spPr>
-          <a:xfrm>
-            <a:off x="6178143" y="4027932"/>
-            <a:ext cx="5446623" cy="2052828"/>
-          </a:xfrm>
-          <a:prstGeom prst="roundRect">
-            <a:avLst>
-              <a:gd name="adj" fmla="val 7126"/>
-            </a:avLst>
-          </a:prstGeom>
-          <a:solidFill>
-            <a:srgbClr val="FFFFFF"/>
-          </a:solidFill>
-          <a:ln w="12700">
-            <a:solidFill>
-              <a:srgbClr val="EAEAE8"/>
-            </a:solidFill>
-          </a:ln>
-          <a:effectLst/>
-        </p:spPr>
-        <p:style>
-          <a:lnRef idx="1">
-            <a:schemeClr val="accent1"/>
-          </a:lnRef>
-          <a:fillRef idx="3">
-            <a:schemeClr val="accent1"/>
-          </a:fillRef>
-          <a:effectRef idx="2">
-            <a:schemeClr val="accent1"/>
-          </a:effectRef>
-          <a:fontRef idx="minor">
-            <a:schemeClr val="lt1"/>
-          </a:fontRef>
-        </p:style>
-        <p:txBody>
-          <a:bodyPr rtlCol="0" anchor="ctr"/>
-          <a:lstStyle/>
-          <a:p/>
-        </p:txBody>
-      </p:sp>
-      <p:sp>
-        <p:nvSpPr>
-          <p:cNvPr id="17" name="TextBox 16"/>
-          <p:cNvSpPr txBox="1"/>
-          <p:nvPr/>
-        </p:nvSpPr>
-        <p:spPr>
-          <a:xfrm>
-            <a:off x="6498183" y="4302252"/>
-            <a:ext cx="4806543" cy="387096"/>
-          </a:xfrm>
-          <a:prstGeom prst="rect">
-            <a:avLst/>
-          </a:prstGeom>
-          <a:noFill/>
-        </p:spPr>
-        <p:txBody>
-          <a:bodyPr wrap="square" lIns="0" rIns="0" tIns="0" bIns="0" anchor="t">
-            <a:spAutoFit/>
-          </a:bodyPr>
-          <a:lstStyle/>
-          <a:p>
-            <a:pPr algn="l">
-              <a:lnSpc>
-                <a:spcPct val="118000"/>
-              </a:lnSpc>
-            </a:pPr>
-            <a:r>
-              <a:rPr sz="2400" b="1" i="0">
-                <a:solidFill>
-                  <a:srgbClr val="1D6B8F"/>
-                </a:solidFill>
-                <a:latin typeface="Verdana"/>
-              </a:rPr>
-              <a:t>jusqu'à la fin</a:t>
-            </a:r>
-          </a:p>
-        </p:txBody>
-      </p:sp>
-      <p:sp>
-        <p:nvSpPr>
-          <p:cNvPr id="18" name="TextBox 17"/>
-          <p:cNvSpPr txBox="1"/>
-          <p:nvPr/>
-        </p:nvSpPr>
-        <p:spPr>
-          <a:xfrm>
-            <a:off x="6498183" y="4716780"/>
-            <a:ext cx="4806543" cy="1089660"/>
-          </a:xfrm>
-          <a:prstGeom prst="rect">
-            <a:avLst/>
-          </a:prstGeom>
-          <a:noFill/>
-        </p:spPr>
-        <p:txBody>
-          <a:bodyPr wrap="square" lIns="0" rIns="0" tIns="0" bIns="0" anchor="t">
-            <a:spAutoFit/>
-          </a:bodyPr>
-          <a:lstStyle/>
-          <a:p>
-            <a:pPr algn="l">
-              <a:lnSpc>
-                <a:spcPct val="142000"/>
-              </a:lnSpc>
-            </a:pPr>
-            <a:r>
-              <a:rPr sz="1800" b="0" i="0">
-                <a:solidFill>
-                  <a:srgbClr val="3A3D40"/>
-                </a:solidFill>
-                <a:latin typeface="Verdana"/>
-              </a:rPr>
-              <a:t>Toute la boîte, même si les symptômes ont disparu.</a:t>
+              <a:rPr sz="2000" b="0" i="0">
+                <a:solidFill>
+                  <a:srgbClr val="4B4F52"/>
+                </a:solidFill>
+                <a:latin typeface="Verdana"/>
+              </a:rPr>
+              <a:t>Pour un antibiotique surtout : arrêter dès qu'on se sent mieux laisse survivre les bactéries les plus résistantes, et l'infection revient plus forte.</a:t>
             </a:r>
           </a:p>
         </p:txBody>
@@ -13031,7 +13678,7 @@
                 </a:solidFill>
                 <a:latin typeface="Verdana"/>
               </a:rPr>
-              <a:t>PRATIQUE · 2 DE 4</a:t>
+              <a:t>ANALYSE</a:t>
             </a:r>
           </a:p>
         </p:txBody>
@@ -13070,64 +13717,25 @@
                 </a:solidFill>
                 <a:latin typeface="Verdana"/>
               </a:rPr>
-              <a:t>Qu'est-ce que ça veut dire ?</a:t>
-            </a:r>
-          </a:p>
-        </p:txBody>
-      </p:sp>
-      <p:sp>
-        <p:nvSpPr>
-          <p:cNvPr id="7" name="TextBox 6"/>
-          <p:cNvSpPr txBox="1"/>
-          <p:nvPr/>
-        </p:nvSpPr>
-        <p:spPr>
-          <a:xfrm>
-            <a:off x="566928" y="1645920"/>
-            <a:ext cx="11057839" cy="329184"/>
-          </a:xfrm>
-          <a:prstGeom prst="rect">
-            <a:avLst/>
-          </a:prstGeom>
-          <a:noFill/>
-        </p:spPr>
-        <p:txBody>
-          <a:bodyPr wrap="square" lIns="0" rIns="0" tIns="0" bIns="0" anchor="t">
-            <a:spAutoFit/>
-          </a:bodyPr>
-          <a:lstStyle/>
-          <a:p>
-            <a:pPr algn="l">
-              <a:lnSpc>
-                <a:spcPct val="135000"/>
-              </a:lnSpc>
-            </a:pPr>
-            <a:r>
-              <a:rPr sz="1800" b="0" i="0">
-                <a:solidFill>
-                  <a:srgbClr val="6E7175"/>
-                </a:solidFill>
-                <a:latin typeface="Verdana"/>
-              </a:rPr>
-              <a:t>Dites la consigne en mots de tous les jours.</a:t>
-            </a:r>
-          </a:p>
-        </p:txBody>
-      </p:sp>
-      <p:sp>
-        <p:nvSpPr>
-          <p:cNvPr id="8" name="Rounded Rectangle 7"/>
+              <a:t>Les mots de l'étiquette</a:t>
+            </a:r>
+          </a:p>
+        </p:txBody>
+      </p:sp>
+      <p:sp>
+        <p:nvSpPr>
+          <p:cNvPr id="7" name="Rounded Rectangle 6"/>
           <p:cNvSpPr/>
           <p:nvPr/>
         </p:nvSpPr>
         <p:spPr>
           <a:xfrm>
-            <a:off x="566928" y="2139696"/>
-            <a:ext cx="11057839" cy="648716"/>
+            <a:off x="566928" y="1810512"/>
+            <a:ext cx="5446623" cy="2052828"/>
           </a:xfrm>
           <a:prstGeom prst="roundRect">
             <a:avLst>
-              <a:gd name="adj" fmla="val 22552"/>
+              <a:gd name="adj" fmla="val 7126"/>
             </a:avLst>
           </a:prstGeom>
           <a:solidFill>
@@ -13162,58 +13770,14 @@
       </p:sp>
       <p:sp>
         <p:nvSpPr>
-          <p:cNvPr id="9" name="Rounded Rectangle 8"/>
-          <p:cNvSpPr/>
-          <p:nvPr/>
-        </p:nvSpPr>
-        <p:spPr>
-          <a:xfrm>
-            <a:off x="841247" y="2281174"/>
-            <a:ext cx="365760" cy="365760"/>
-          </a:xfrm>
-          <a:prstGeom prst="roundRect">
-            <a:avLst>
-              <a:gd name="adj" fmla="val 32500"/>
-            </a:avLst>
-          </a:prstGeom>
-          <a:solidFill>
-            <a:srgbClr val="E7F0F6"/>
-          </a:solidFill>
-          <a:ln>
-            <a:noFill/>
-          </a:ln>
-          <a:effectLst/>
-        </p:spPr>
-        <p:style>
-          <a:lnRef idx="1">
-            <a:schemeClr val="accent1"/>
-          </a:lnRef>
-          <a:fillRef idx="3">
-            <a:schemeClr val="accent1"/>
-          </a:fillRef>
-          <a:effectRef idx="2">
-            <a:schemeClr val="accent1"/>
-          </a:effectRef>
-          <a:fontRef idx="minor">
-            <a:schemeClr val="lt1"/>
-          </a:fontRef>
-        </p:style>
-        <p:txBody>
-          <a:bodyPr rtlCol="0" anchor="ctr"/>
-          <a:lstStyle/>
-          <a:p/>
-        </p:txBody>
-      </p:sp>
-      <p:sp>
-        <p:nvSpPr>
-          <p:cNvPr id="10" name="TextBox 9"/>
+          <p:cNvPr id="8" name="TextBox 7"/>
           <p:cNvSpPr txBox="1"/>
           <p:nvPr/>
         </p:nvSpPr>
         <p:spPr>
           <a:xfrm>
-            <a:off x="841247" y="2345182"/>
-            <a:ext cx="365760" cy="256032"/>
+            <a:off x="886968" y="2084831"/>
+            <a:ext cx="4806543" cy="387096"/>
           </a:xfrm>
           <a:prstGeom prst="rect">
             <a:avLst/>
@@ -13226,33 +13790,33 @@
           </a:bodyPr>
           <a:lstStyle/>
           <a:p>
-            <a:pPr algn="ctr">
+            <a:pPr algn="l">
               <a:lnSpc>
-                <a:spcPct val="135000"/>
+                <a:spcPct val="118000"/>
               </a:lnSpc>
             </a:pPr>
             <a:r>
-              <a:rPr sz="1500" b="1" i="0">
+              <a:rPr sz="2400" b="1" i="0">
                 <a:solidFill>
                   <a:srgbClr val="1D6B8F"/>
                 </a:solidFill>
                 <a:latin typeface="Verdana"/>
               </a:rPr>
-              <a:t>1</a:t>
-            </a:r>
-          </a:p>
-        </p:txBody>
-      </p:sp>
-      <p:sp>
-        <p:nvSpPr>
-          <p:cNvPr id="11" name="TextBox 10"/>
+              <a:t>par voie orale</a:t>
+            </a:r>
+          </a:p>
+        </p:txBody>
+      </p:sp>
+      <p:sp>
+        <p:nvSpPr>
+          <p:cNvPr id="9" name="TextBox 8"/>
           <p:cNvSpPr txBox="1"/>
           <p:nvPr/>
         </p:nvSpPr>
         <p:spPr>
           <a:xfrm>
-            <a:off x="1344168" y="2295144"/>
-            <a:ext cx="10097719" cy="374396"/>
+            <a:off x="886968" y="2499360"/>
+            <a:ext cx="4806543" cy="1089660"/>
           </a:xfrm>
           <a:prstGeom prst="rect">
             <a:avLst/>
@@ -13267,35 +13831,35 @@
           <a:p>
             <a:pPr algn="l">
               <a:lnSpc>
-                <a:spcPct val="140000"/>
+                <a:spcPct val="142000"/>
               </a:lnSpc>
             </a:pPr>
             <a:r>
-              <a:rPr sz="1900" b="0" i="0">
+              <a:rPr sz="1800" b="0" i="0">
                 <a:solidFill>
                   <a:srgbClr val="3A3D40"/>
                 </a:solidFill>
                 <a:latin typeface="Verdana"/>
               </a:rPr>
-              <a:t>« Un comprimé aux douze heures. »</a:t>
-            </a:r>
-          </a:p>
-        </p:txBody>
-      </p:sp>
-      <p:sp>
-        <p:nvSpPr>
-          <p:cNvPr id="12" name="Rounded Rectangle 11"/>
+              <a:t>Par la bouche. S'oppose à « en application locale », sur la peau.</a:t>
+            </a:r>
+          </a:p>
+        </p:txBody>
+      </p:sp>
+      <p:sp>
+        <p:nvSpPr>
+          <p:cNvPr id="10" name="Rounded Rectangle 9"/>
           <p:cNvSpPr/>
           <p:nvPr/>
         </p:nvSpPr>
         <p:spPr>
           <a:xfrm>
-            <a:off x="566928" y="2916428"/>
-            <a:ext cx="11057839" cy="986535"/>
+            <a:off x="6178143" y="1810512"/>
+            <a:ext cx="5446623" cy="2052828"/>
           </a:xfrm>
           <a:prstGeom prst="roundRect">
             <a:avLst>
-              <a:gd name="adj" fmla="val 14830"/>
+              <a:gd name="adj" fmla="val 7126"/>
             </a:avLst>
           </a:prstGeom>
           <a:solidFill>
@@ -13330,58 +13894,14 @@
       </p:sp>
       <p:sp>
         <p:nvSpPr>
-          <p:cNvPr id="13" name="Rounded Rectangle 12"/>
-          <p:cNvSpPr/>
-          <p:nvPr/>
-        </p:nvSpPr>
-        <p:spPr>
-          <a:xfrm>
-            <a:off x="841247" y="3226815"/>
-            <a:ext cx="365760" cy="365760"/>
-          </a:xfrm>
-          <a:prstGeom prst="roundRect">
-            <a:avLst>
-              <a:gd name="adj" fmla="val 32500"/>
-            </a:avLst>
-          </a:prstGeom>
-          <a:solidFill>
-            <a:srgbClr val="E7F0F6"/>
-          </a:solidFill>
-          <a:ln>
-            <a:noFill/>
-          </a:ln>
-          <a:effectLst/>
-        </p:spPr>
-        <p:style>
-          <a:lnRef idx="1">
-            <a:schemeClr val="accent1"/>
-          </a:lnRef>
-          <a:fillRef idx="3">
-            <a:schemeClr val="accent1"/>
-          </a:fillRef>
-          <a:effectRef idx="2">
-            <a:schemeClr val="accent1"/>
-          </a:effectRef>
-          <a:fontRef idx="minor">
-            <a:schemeClr val="lt1"/>
-          </a:fontRef>
-        </p:style>
-        <p:txBody>
-          <a:bodyPr rtlCol="0" anchor="ctr"/>
-          <a:lstStyle/>
-          <a:p/>
-        </p:txBody>
-      </p:sp>
-      <p:sp>
-        <p:nvSpPr>
-          <p:cNvPr id="14" name="TextBox 13"/>
+          <p:cNvPr id="11" name="TextBox 10"/>
           <p:cNvSpPr txBox="1"/>
           <p:nvPr/>
         </p:nvSpPr>
         <p:spPr>
           <a:xfrm>
-            <a:off x="841247" y="3290823"/>
-            <a:ext cx="365760" cy="256032"/>
+            <a:off x="6498183" y="2084831"/>
+            <a:ext cx="4806543" cy="387096"/>
           </a:xfrm>
           <a:prstGeom prst="rect">
             <a:avLst/>
@@ -13394,33 +13914,33 @@
           </a:bodyPr>
           <a:lstStyle/>
           <a:p>
-            <a:pPr algn="ctr">
+            <a:pPr algn="l">
               <a:lnSpc>
-                <a:spcPct val="135000"/>
+                <a:spcPct val="118000"/>
               </a:lnSpc>
             </a:pPr>
             <a:r>
-              <a:rPr sz="1500" b="1" i="0">
+              <a:rPr sz="2400" b="1" i="0">
                 <a:solidFill>
                   <a:srgbClr val="1D6B8F"/>
                 </a:solidFill>
                 <a:latin typeface="Verdana"/>
               </a:rPr>
-              <a:t>2</a:t>
-            </a:r>
-          </a:p>
-        </p:txBody>
-      </p:sp>
-      <p:sp>
-        <p:nvSpPr>
-          <p:cNvPr id="15" name="TextBox 14"/>
+              <a:t>au besoin</a:t>
+            </a:r>
+          </a:p>
+        </p:txBody>
+      </p:sp>
+      <p:sp>
+        <p:nvSpPr>
+          <p:cNvPr id="12" name="TextBox 11"/>
           <p:cNvSpPr txBox="1"/>
           <p:nvPr/>
         </p:nvSpPr>
         <p:spPr>
           <a:xfrm>
-            <a:off x="1344168" y="3071876"/>
-            <a:ext cx="10097719" cy="712215"/>
+            <a:off x="6498183" y="2499360"/>
+            <a:ext cx="4806543" cy="1089660"/>
           </a:xfrm>
           <a:prstGeom prst="rect">
             <a:avLst/>
@@ -13435,35 +13955,35 @@
           <a:p>
             <a:pPr algn="l">
               <a:lnSpc>
-                <a:spcPct val="140000"/>
+                <a:spcPct val="142000"/>
               </a:lnSpc>
             </a:pPr>
             <a:r>
-              <a:rPr sz="1900" b="0" i="0">
+              <a:rPr sz="1800" b="0" i="0">
                 <a:solidFill>
                   <a:srgbClr val="3A3D40"/>
                 </a:solidFill>
                 <a:latin typeface="Verdana"/>
               </a:rPr>
-              <a:t>« Deux comprimés au besoin, maximum six par jour. »</a:t>
-            </a:r>
-          </a:p>
-        </p:txBody>
-      </p:sp>
-      <p:sp>
-        <p:nvSpPr>
-          <p:cNvPr id="16" name="Rounded Rectangle 15"/>
+              <a:t>Seulement si vous avez mal. Ce n'est pas obligatoire, contrairement à un antibiotique.</a:t>
+            </a:r>
+          </a:p>
+        </p:txBody>
+      </p:sp>
+      <p:sp>
+        <p:nvSpPr>
+          <p:cNvPr id="13" name="Rounded Rectangle 12"/>
           <p:cNvSpPr/>
           <p:nvPr/>
         </p:nvSpPr>
         <p:spPr>
           <a:xfrm>
-            <a:off x="566928" y="4030980"/>
-            <a:ext cx="11057839" cy="648716"/>
+            <a:off x="566928" y="4027932"/>
+            <a:ext cx="5446623" cy="2052828"/>
           </a:xfrm>
           <a:prstGeom prst="roundRect">
             <a:avLst>
-              <a:gd name="adj" fmla="val 22552"/>
+              <a:gd name="adj" fmla="val 7126"/>
             </a:avLst>
           </a:prstGeom>
           <a:solidFill>
@@ -13498,58 +14018,14 @@
       </p:sp>
       <p:sp>
         <p:nvSpPr>
-          <p:cNvPr id="17" name="Rounded Rectangle 16"/>
-          <p:cNvSpPr/>
-          <p:nvPr/>
-        </p:nvSpPr>
-        <p:spPr>
-          <a:xfrm>
-            <a:off x="841247" y="4172458"/>
-            <a:ext cx="365760" cy="365760"/>
-          </a:xfrm>
-          <a:prstGeom prst="roundRect">
-            <a:avLst>
-              <a:gd name="adj" fmla="val 32500"/>
-            </a:avLst>
-          </a:prstGeom>
-          <a:solidFill>
-            <a:srgbClr val="E7F0F6"/>
-          </a:solidFill>
-          <a:ln>
-            <a:noFill/>
-          </a:ln>
-          <a:effectLst/>
-        </p:spPr>
-        <p:style>
-          <a:lnRef idx="1">
-            <a:schemeClr val="accent1"/>
-          </a:lnRef>
-          <a:fillRef idx="3">
-            <a:schemeClr val="accent1"/>
-          </a:fillRef>
-          <a:effectRef idx="2">
-            <a:schemeClr val="accent1"/>
-          </a:effectRef>
-          <a:fontRef idx="minor">
-            <a:schemeClr val="lt1"/>
-          </a:fontRef>
-        </p:style>
-        <p:txBody>
-          <a:bodyPr rtlCol="0" anchor="ctr"/>
-          <a:lstStyle/>
-          <a:p/>
-        </p:txBody>
-      </p:sp>
-      <p:sp>
-        <p:nvSpPr>
-          <p:cNvPr id="18" name="TextBox 17"/>
+          <p:cNvPr id="14" name="TextBox 13"/>
           <p:cNvSpPr txBox="1"/>
           <p:nvPr/>
         </p:nvSpPr>
         <p:spPr>
           <a:xfrm>
-            <a:off x="841247" y="4236466"/>
-            <a:ext cx="365760" cy="256032"/>
+            <a:off x="886968" y="4302252"/>
+            <a:ext cx="4806543" cy="387096"/>
           </a:xfrm>
           <a:prstGeom prst="rect">
             <a:avLst/>
@@ -13562,33 +14038,33 @@
           </a:bodyPr>
           <a:lstStyle/>
           <a:p>
-            <a:pPr algn="ctr">
+            <a:pPr algn="l">
               <a:lnSpc>
-                <a:spcPct val="135000"/>
+                <a:spcPct val="118000"/>
               </a:lnSpc>
             </a:pPr>
             <a:r>
-              <a:rPr sz="1500" b="1" i="0">
+              <a:rPr sz="2400" b="1" i="0">
                 <a:solidFill>
                   <a:srgbClr val="1D6B8F"/>
                 </a:solidFill>
                 <a:latin typeface="Verdana"/>
               </a:rPr>
-              <a:t>3</a:t>
-            </a:r>
-          </a:p>
-        </p:txBody>
-      </p:sp>
-      <p:sp>
-        <p:nvSpPr>
-          <p:cNvPr id="19" name="TextBox 18"/>
+              <a:t>à jeun</a:t>
+            </a:r>
+          </a:p>
+        </p:txBody>
+      </p:sp>
+      <p:sp>
+        <p:nvSpPr>
+          <p:cNvPr id="15" name="TextBox 14"/>
           <p:cNvSpPr txBox="1"/>
           <p:nvPr/>
         </p:nvSpPr>
         <p:spPr>
           <a:xfrm>
-            <a:off x="1344168" y="4186428"/>
-            <a:ext cx="10097719" cy="374396"/>
+            <a:off x="886968" y="4716780"/>
+            <a:ext cx="4806543" cy="1089660"/>
           </a:xfrm>
           <a:prstGeom prst="rect">
             <a:avLst/>
@@ -13603,35 +14079,35 @@
           <a:p>
             <a:pPr algn="l">
               <a:lnSpc>
-                <a:spcPct val="140000"/>
+                <a:spcPct val="142000"/>
               </a:lnSpc>
             </a:pPr>
             <a:r>
-              <a:rPr sz="1900" b="0" i="0">
+              <a:rPr sz="1800" b="0" i="0">
                 <a:solidFill>
                   <a:srgbClr val="3A3D40"/>
                 </a:solidFill>
                 <a:latin typeface="Verdana"/>
               </a:rPr>
-              <a:t>« À prendre à jeun. »</a:t>
-            </a:r>
-          </a:p>
-        </p:txBody>
-      </p:sp>
-      <p:sp>
-        <p:nvSpPr>
-          <p:cNvPr id="20" name="Rounded Rectangle 19"/>
+              <a:t>L'estomac vide, souvent une heure avant le repas.</a:t>
+            </a:r>
+          </a:p>
+        </p:txBody>
+      </p:sp>
+      <p:sp>
+        <p:nvSpPr>
+          <p:cNvPr id="16" name="Rounded Rectangle 15"/>
           <p:cNvSpPr/>
           <p:nvPr/>
         </p:nvSpPr>
         <p:spPr>
           <a:xfrm>
-            <a:off x="566928" y="4807711"/>
-            <a:ext cx="11057839" cy="648716"/>
+            <a:off x="6178143" y="4027932"/>
+            <a:ext cx="5446623" cy="2052828"/>
           </a:xfrm>
           <a:prstGeom prst="roundRect">
             <a:avLst>
-              <a:gd name="adj" fmla="val 22552"/>
+              <a:gd name="adj" fmla="val 7126"/>
             </a:avLst>
           </a:prstGeom>
           <a:solidFill>
@@ -13666,58 +14142,14 @@
       </p:sp>
       <p:sp>
         <p:nvSpPr>
-          <p:cNvPr id="21" name="Rounded Rectangle 20"/>
-          <p:cNvSpPr/>
-          <p:nvPr/>
-        </p:nvSpPr>
-        <p:spPr>
-          <a:xfrm>
-            <a:off x="841247" y="4949190"/>
-            <a:ext cx="365760" cy="365760"/>
-          </a:xfrm>
-          <a:prstGeom prst="roundRect">
-            <a:avLst>
-              <a:gd name="adj" fmla="val 32500"/>
-            </a:avLst>
-          </a:prstGeom>
-          <a:solidFill>
-            <a:srgbClr val="E7F0F6"/>
-          </a:solidFill>
-          <a:ln>
-            <a:noFill/>
-          </a:ln>
-          <a:effectLst/>
-        </p:spPr>
-        <p:style>
-          <a:lnRef idx="1">
-            <a:schemeClr val="accent1"/>
-          </a:lnRef>
-          <a:fillRef idx="3">
-            <a:schemeClr val="accent1"/>
-          </a:fillRef>
-          <a:effectRef idx="2">
-            <a:schemeClr val="accent1"/>
-          </a:effectRef>
-          <a:fontRef idx="minor">
-            <a:schemeClr val="lt1"/>
-          </a:fontRef>
-        </p:style>
-        <p:txBody>
-          <a:bodyPr rtlCol="0" anchor="ctr"/>
-          <a:lstStyle/>
-          <a:p/>
-        </p:txBody>
-      </p:sp>
-      <p:sp>
-        <p:nvSpPr>
-          <p:cNvPr id="22" name="TextBox 21"/>
+          <p:cNvPr id="17" name="TextBox 16"/>
           <p:cNvSpPr txBox="1"/>
           <p:nvPr/>
         </p:nvSpPr>
         <p:spPr>
           <a:xfrm>
-            <a:off x="841247" y="5013198"/>
-            <a:ext cx="365760" cy="256032"/>
+            <a:off x="6498183" y="4302252"/>
+            <a:ext cx="4806543" cy="387096"/>
           </a:xfrm>
           <a:prstGeom prst="rect">
             <a:avLst/>
@@ -13730,33 +14162,33 @@
           </a:bodyPr>
           <a:lstStyle/>
           <a:p>
-            <a:pPr algn="ctr">
+            <a:pPr algn="l">
               <a:lnSpc>
-                <a:spcPct val="135000"/>
+                <a:spcPct val="118000"/>
               </a:lnSpc>
             </a:pPr>
             <a:r>
-              <a:rPr sz="1500" b="1" i="0">
+              <a:rPr sz="2400" b="1" i="0">
                 <a:solidFill>
                   <a:srgbClr val="1D6B8F"/>
                 </a:solidFill>
                 <a:latin typeface="Verdana"/>
               </a:rPr>
-              <a:t>4</a:t>
-            </a:r>
-          </a:p>
-        </p:txBody>
-      </p:sp>
-      <p:sp>
-        <p:nvSpPr>
-          <p:cNvPr id="23" name="TextBox 22"/>
+              <a:t>jusqu'à la fin</a:t>
+            </a:r>
+          </a:p>
+        </p:txBody>
+      </p:sp>
+      <p:sp>
+        <p:nvSpPr>
+          <p:cNvPr id="18" name="TextBox 17"/>
           <p:cNvSpPr txBox="1"/>
           <p:nvPr/>
         </p:nvSpPr>
         <p:spPr>
           <a:xfrm>
-            <a:off x="1344168" y="4963159"/>
-            <a:ext cx="10097719" cy="374396"/>
+            <a:off x="6498183" y="4716780"/>
+            <a:ext cx="4806543" cy="1089660"/>
           </a:xfrm>
           <a:prstGeom prst="rect">
             <a:avLst/>
@@ -13771,17 +14203,17 @@
           <a:p>
             <a:pPr algn="l">
               <a:lnSpc>
-                <a:spcPct val="140000"/>
+                <a:spcPct val="142000"/>
               </a:lnSpc>
             </a:pPr>
             <a:r>
-              <a:rPr sz="1900" b="0" i="0">
+              <a:rPr sz="1800" b="0" i="0">
                 <a:solidFill>
                   <a:srgbClr val="3A3D40"/>
                 </a:solidFill>
                 <a:latin typeface="Verdana"/>
               </a:rPr>
-              <a:t>« Jusqu'à la fin du traitement. »</a:t>
+              <a:t>Toute la boîte, même si les symptômes ont disparu.</a:t>
             </a:r>
           </a:p>
         </p:txBody>
@@ -13958,7 +14390,7 @@
                 </a:solidFill>
                 <a:latin typeface="Verdana"/>
               </a:rPr>
-              <a:t>CORRECTION</a:t>
+              <a:t>PRATIQUE · 2 DE 4</a:t>
             </a:r>
           </a:p>
         </p:txBody>
@@ -14036,7 +14468,7 @@
                 </a:solidFill>
                 <a:latin typeface="Verdana"/>
               </a:rPr>
-              <a:t>Correction — on lit la réponse, on ne commente pas l'erreur.</a:t>
+              <a:t>Dites la consigne en mots de tous les jours.</a:t>
             </a:r>
           </a:p>
         </p:txBody>
@@ -14058,7 +14490,7 @@
             </a:avLst>
           </a:prstGeom>
           <a:solidFill>
-            <a:srgbClr val="E6F5EE"/>
+            <a:srgbClr val="FFFFFF"/>
           </a:solidFill>
           <a:ln w="12700">
             <a:solidFill>
@@ -14204,16 +14636,7 @@
                 </a:solidFill>
                 <a:latin typeface="Verdana"/>
               </a:rPr>
-              <a:t>« Un comprimé aux douze heures. »   </a:t>
-            </a:r>
-            <a:r>
-              <a:rPr sz="1900" b="1" i="0">
-                <a:solidFill>
-                  <a:srgbClr val="07734A"/>
-                </a:solidFill>
-                <a:latin typeface="Verdana"/>
-              </a:rPr>
-              <a:t>» un le matin, un le soir</a:t>
+              <a:t>« Un comprimé aux douze heures. »</a:t>
             </a:r>
           </a:p>
         </p:txBody>
@@ -14235,7 +14658,7 @@
             </a:avLst>
           </a:prstGeom>
           <a:solidFill>
-            <a:srgbClr val="E6F5EE"/>
+            <a:srgbClr val="FFFFFF"/>
           </a:solidFill>
           <a:ln w="12700">
             <a:solidFill>
@@ -14381,16 +14804,7 @@
                 </a:solidFill>
                 <a:latin typeface="Verdana"/>
               </a:rPr>
-              <a:t>« Deux comprimés au besoin, maximum six par jour. »   </a:t>
-            </a:r>
-            <a:r>
-              <a:rPr sz="1900" b="1" i="0">
-                <a:solidFill>
-                  <a:srgbClr val="07734A"/>
-                </a:solidFill>
-                <a:latin typeface="Verdana"/>
-              </a:rPr>
-              <a:t>» seulement si j'ai mal, et jamais plus de six</a:t>
+              <a:t>« Deux comprimés au besoin, maximum six par jour. »</a:t>
             </a:r>
           </a:p>
         </p:txBody>
@@ -14412,7 +14826,7 @@
             </a:avLst>
           </a:prstGeom>
           <a:solidFill>
-            <a:srgbClr val="E6F5EE"/>
+            <a:srgbClr val="FFFFFF"/>
           </a:solidFill>
           <a:ln w="12700">
             <a:solidFill>
@@ -14558,16 +14972,7 @@
                 </a:solidFill>
                 <a:latin typeface="Verdana"/>
               </a:rPr>
-              <a:t>« À prendre à jeun. »   </a:t>
-            </a:r>
-            <a:r>
-              <a:rPr sz="1900" b="1" i="0">
-                <a:solidFill>
-                  <a:srgbClr val="07734A"/>
-                </a:solidFill>
-                <a:latin typeface="Verdana"/>
-              </a:rPr>
-              <a:t>» l'estomac vide, avant de manger</a:t>
+              <a:t>« À prendre à jeun. »</a:t>
             </a:r>
           </a:p>
         </p:txBody>
@@ -14589,7 +14994,7 @@
             </a:avLst>
           </a:prstGeom>
           <a:solidFill>
-            <a:srgbClr val="E6F5EE"/>
+            <a:srgbClr val="FFFFFF"/>
           </a:solidFill>
           <a:ln w="12700">
             <a:solidFill>
@@ -14735,16 +15140,7 @@
                 </a:solidFill>
                 <a:latin typeface="Verdana"/>
               </a:rPr>
-              <a:t>« Jusqu'à la fin du traitement. »   </a:t>
-            </a:r>
-            <a:r>
-              <a:rPr sz="1900" b="1" i="0">
-                <a:solidFill>
-                  <a:srgbClr val="07734A"/>
-                </a:solidFill>
-                <a:latin typeface="Verdana"/>
-              </a:rPr>
-              <a:t>» toute la boîte, même si je vais mieux</a:t>
+              <a:t>« Jusqu'à la fin du traitement. »</a:t>
             </a:r>
           </a:p>
         </p:txBody>
